--- a/vauldandsouza_Submission/PPT_Slides/Final_Presentation.pptx
+++ b/vauldandsouza_Submission/PPT_Slides/Final_Presentation.pptx
@@ -4,6 +4,9 @@
   <p:sldMasterIdLst>
     <p:sldMasterId id="2147483648" r:id="rId1"/>
   </p:sldMasterIdLst>
+  <p:notesMasterIdLst>
+    <p:notesMasterId r:id="rId19"/>
+  </p:notesMasterIdLst>
   <p:sldIdLst>
     <p:sldId id="256" r:id="rId2"/>
     <p:sldId id="257" r:id="rId3"/>
@@ -23,10 +26,7 @@
     <p:sldId id="271" r:id="rId17"/>
     <p:sldId id="272" r:id="rId18"/>
   </p:sldIdLst>
-  <p:notesMasterIdLst>
-    <p:notesMasterId r:id="rId19"/>
-  </p:notesMasterIdLst>
-  <p:sldSz cx="9144000" cy="5143500"/>
+  <p:sldSz cx="9144000" cy="5143500" type="screen16x9"/>
   <p:notesSz cx="5143500" cy="9144000"/>
   <p:defaultTextStyle>
     <a:lvl1pPr marL="0" algn="l" defTabSz="914400" rtl="0" eaLnBrk="1" latinLnBrk="0" hangingPunct="1">
@@ -120,6 +120,11 @@
       </a:defRPr>
     </a:lvl9pPr>
   </p:defaultTextStyle>
+  <p:extLst>
+    <p:ext uri="{EFAFB233-063F-42B5-8137-9DF3F51BA10A}">
+      <p15:sldGuideLst xmlns:p15="http://schemas.microsoft.com/office/powerpoint/2012/main"/>
+    </p:ext>
+  </p:extLst>
 </p:presentation>
 </file>
 
@@ -145,234 +150,10 @@
           <a:chExt cx="0" cy="0"/>
         </a:xfrm>
       </p:grpSpPr>
-      <p:sp>
-        <p:nvSpPr>
-          <p:cNvPr id="2" name="Header Placeholder 1"/>
-          <p:cNvSpPr>
-            <a:spLocks noGrp="1"/>
-          </p:cNvSpPr>
-          <p:nvPr>
-            <p:ph type="hdr" sz="quarter"/>
-          </p:nvPr>
-        </p:nvSpPr>
-        <p:spPr>
-          <a:xfrm>
-            <a:off x="0" y="0"/>
-            <a:ext cx="2971800" cy="458788"/>
-          </a:xfrm>
-          <a:prstGeom prst="rect">
-            <a:avLst/>
-          </a:prstGeom>
-        </p:spPr>
-        <p:txBody>
-          <a:bodyPr vert="horz" lIns="91440" tIns="45720" rIns="91440" bIns="45720" rtlCol="0"/>
-          <a:lstStyle>
-            <a:lvl1pPr algn="l">
-              <a:defRPr sz="1200"/>
-            </a:lvl1pPr>
-          </a:lstStyle>
-          <a:p>
-            <a:endParaRPr lang="en-US"/>
-          </a:p>
-        </p:txBody>
-      </p:sp>
-      <p:sp>
-        <p:nvSpPr>
-          <p:cNvPr id="3" name="Date Placeholder 2"/>
-          <p:cNvSpPr>
-            <a:spLocks noGrp="1"/>
-          </p:cNvSpPr>
-          <p:nvPr>
-            <p:ph type="dt" idx="1"/>
-          </p:nvPr>
-        </p:nvSpPr>
-        <p:spPr>
-          <a:xfrm>
-            <a:off x="3884613" y="0"/>
-            <a:ext cx="2971800" cy="458788"/>
-          </a:xfrm>
-          <a:prstGeom prst="rect">
-            <a:avLst/>
-          </a:prstGeom>
-        </p:spPr>
-        <p:txBody>
-          <a:bodyPr vert="horz" lIns="91440" tIns="45720" rIns="91440" bIns="45720" rtlCol="0"/>
-          <a:lstStyle>
-            <a:lvl1pPr algn="r">
-              <a:defRPr sz="1200"/>
-            </a:lvl1pPr>
-          </a:lstStyle>
-          <a:p>
-            <a:fld id="{5282F153-3F37-0F45-9E97-73ACFA13230C}" type="datetimeFigureOut">
-              <a:rPr lang="en-US"/>
-              <a:t>7/23/19</a:t>
-            </a:fld>
-            <a:endParaRPr lang="en-US"/>
-          </a:p>
-        </p:txBody>
-      </p:sp>
-      <p:sp>
-        <p:nvSpPr>
-          <p:cNvPr id="4" name="Slide Image Placeholder 3"/>
-          <p:cNvSpPr>
-            <a:spLocks noGrp="1" noRot="1" noChangeAspect="1"/>
-          </p:cNvSpPr>
-          <p:nvPr>
-            <p:ph type="sldImg" idx="2"/>
-          </p:nvPr>
-        </p:nvSpPr>
-        <p:spPr>
-          <a:xfrm>
-            <a:off x="685800" y="1143000"/>
-            <a:ext cx="5486400" cy="3086100"/>
-          </a:xfrm>
-          <a:prstGeom prst="rect">
-            <a:avLst/>
-          </a:prstGeom>
-          <a:noFill/>
-          <a:ln w="12700">
-            <a:solidFill>
-              <a:prstClr val="black"/>
-            </a:solidFill>
-          </a:ln>
-        </p:spPr>
-        <p:txBody>
-          <a:bodyPr vert="horz" lIns="91440" tIns="45720" rIns="91440" bIns="45720" rtlCol="0" anchor="ctr"/>
-          <a:lstStyle/>
-          <a:p>
-            <a:endParaRPr lang="en-US"/>
-          </a:p>
-        </p:txBody>
-      </p:sp>
-      <p:sp>
-        <p:nvSpPr>
-          <p:cNvPr id="5" name="Notes Placeholder 4"/>
-          <p:cNvSpPr>
-            <a:spLocks noGrp="1"/>
-          </p:cNvSpPr>
-          <p:nvPr>
-            <p:ph type="body" sz="quarter" idx="3"/>
-          </p:nvPr>
-        </p:nvSpPr>
-        <p:spPr>
-          <a:xfrm>
-            <a:off x="685800" y="4400550"/>
-            <a:ext cx="5486400" cy="3600450"/>
-          </a:xfrm>
-          <a:prstGeom prst="rect">
-            <a:avLst/>
-          </a:prstGeom>
-        </p:spPr>
-        <p:txBody>
-          <a:bodyPr vert="horz" lIns="91440" tIns="45720" rIns="91440" bIns="45720" rtlCol="0"/>
-          <a:lstStyle/>
-          <a:p>
-            <a:pPr lvl="0"/>
-            <a:r>
-              <a:rPr lang="en-US"/>
-              <a:t>Click to edit Master text styles</a:t>
-            </a:r>
-          </a:p>
-          <a:p>
-            <a:pPr lvl="1"/>
-            <a:r>
-              <a:rPr lang="en-US"/>
-              <a:t>Second level</a:t>
-            </a:r>
-          </a:p>
-          <a:p>
-            <a:pPr lvl="2"/>
-            <a:r>
-              <a:rPr lang="en-US"/>
-              <a:t>Third level</a:t>
-            </a:r>
-          </a:p>
-          <a:p>
-            <a:pPr lvl="3"/>
-            <a:r>
-              <a:rPr lang="en-US"/>
-              <a:t>Fourth level</a:t>
-            </a:r>
-          </a:p>
-          <a:p>
-            <a:pPr lvl="4"/>
-            <a:r>
-              <a:rPr lang="en-US"/>
-              <a:t>Fifth level</a:t>
-            </a:r>
-          </a:p>
-        </p:txBody>
-      </p:sp>
-      <p:sp>
-        <p:nvSpPr>
-          <p:cNvPr id="6" name="Footer Placeholder 5"/>
-          <p:cNvSpPr>
-            <a:spLocks noGrp="1"/>
-          </p:cNvSpPr>
-          <p:nvPr>
-            <p:ph type="ftr" sz="quarter" idx="4"/>
-          </p:nvPr>
-        </p:nvSpPr>
-        <p:spPr>
-          <a:xfrm>
-            <a:off x="0" y="8685213"/>
-            <a:ext cx="2971800" cy="458787"/>
-          </a:xfrm>
-          <a:prstGeom prst="rect">
-            <a:avLst/>
-          </a:prstGeom>
-        </p:spPr>
-        <p:txBody>
-          <a:bodyPr vert="horz" lIns="91440" tIns="45720" rIns="91440" bIns="45720" rtlCol="0" anchor="b"/>
-          <a:lstStyle>
-            <a:lvl1pPr algn="l">
-              <a:defRPr sz="1200"/>
-            </a:lvl1pPr>
-          </a:lstStyle>
-          <a:p>
-            <a:endParaRPr lang="en-US"/>
-          </a:p>
-        </p:txBody>
-      </p:sp>
-      <p:sp>
-        <p:nvSpPr>
-          <p:cNvPr id="7" name="Slide Number Placeholder 6"/>
-          <p:cNvSpPr>
-            <a:spLocks noGrp="1"/>
-          </p:cNvSpPr>
-          <p:nvPr>
-            <p:ph type="sldNum" sz="quarter" idx="5"/>
-          </p:nvPr>
-        </p:nvSpPr>
-        <p:spPr>
-          <a:xfrm>
-            <a:off x="3884613" y="8685213"/>
-            <a:ext cx="2971800" cy="458787"/>
-          </a:xfrm>
-          <a:prstGeom prst="rect">
-            <a:avLst/>
-          </a:prstGeom>
-        </p:spPr>
-        <p:txBody>
-          <a:bodyPr vert="horz" lIns="91440" tIns="45720" rIns="91440" bIns="45720" rtlCol="0" anchor="b"/>
-          <a:lstStyle>
-            <a:lvl1pPr algn="r">
-              <a:defRPr sz="1200"/>
-            </a:lvl1pPr>
-          </a:lstStyle>
-          <a:p>
-            <a:fld id="{CE5E9CC1-C706-0F49-92D6-E571CC5EEA8F}" type="slidenum">
-              <a:rPr lang="en-US"/>
-              <a:t>‹#›</a:t>
-            </a:fld>
-            <a:endParaRPr lang="en-US"/>
-          </a:p>
-        </p:txBody>
-      </p:sp>
     </p:spTree>
     <p:extLst>
       <p:ext uri="{BB962C8B-B14F-4D97-AF65-F5344CB8AC3E}">
-        <p14:creationId xmlns:p14="http://schemas.microsoft.com/office/powerpoint/2010/main" val="1024086991"/>
+        <p14:creationId xmlns:p14="http://schemas.microsoft.com/office/powerpoint/2010/main" val="920435263"/>
       </p:ext>
     </p:extLst>
   </p:cSld>
@@ -516,10 +297,6 @@
           <a:bodyPr/>
           <a:lstStyle/>
           <a:p>
-            <a:r>
-              <a:rPr lang="en-US" dirty="0"/>
-              <a:t/>
-            </a:r>
             <a:endParaRPr lang="en-US" dirty="0"/>
           </a:p>
         </p:txBody>
@@ -604,10 +381,6 @@
           <a:bodyPr/>
           <a:lstStyle/>
           <a:p>
-            <a:r>
-              <a:rPr lang="en-US" dirty="0"/>
-              <a:t/>
-            </a:r>
             <a:endParaRPr lang="en-US" dirty="0"/>
           </a:p>
         </p:txBody>
@@ -692,10 +465,6 @@
           <a:bodyPr/>
           <a:lstStyle/>
           <a:p>
-            <a:r>
-              <a:rPr lang="en-US" dirty="0"/>
-              <a:t/>
-            </a:r>
             <a:endParaRPr lang="en-US" dirty="0"/>
           </a:p>
         </p:txBody>
@@ -780,10 +549,6 @@
           <a:bodyPr/>
           <a:lstStyle/>
           <a:p>
-            <a:r>
-              <a:rPr lang="en-US" dirty="0"/>
-              <a:t/>
-            </a:r>
             <a:endParaRPr lang="en-US" dirty="0"/>
           </a:p>
         </p:txBody>
@@ -868,10 +633,6 @@
           <a:bodyPr/>
           <a:lstStyle/>
           <a:p>
-            <a:r>
-              <a:rPr lang="en-US" dirty="0"/>
-              <a:t/>
-            </a:r>
             <a:endParaRPr lang="en-US" dirty="0"/>
           </a:p>
         </p:txBody>
@@ -956,10 +717,6 @@
           <a:bodyPr/>
           <a:lstStyle/>
           <a:p>
-            <a:r>
-              <a:rPr lang="en-US" dirty="0"/>
-              <a:t/>
-            </a:r>
             <a:endParaRPr lang="en-US" dirty="0"/>
           </a:p>
         </p:txBody>
@@ -1044,10 +801,6 @@
           <a:bodyPr/>
           <a:lstStyle/>
           <a:p>
-            <a:r>
-              <a:rPr lang="en-US" dirty="0"/>
-              <a:t/>
-            </a:r>
             <a:endParaRPr lang="en-US" dirty="0"/>
           </a:p>
         </p:txBody>
@@ -1132,10 +885,6 @@
           <a:bodyPr/>
           <a:lstStyle/>
           <a:p>
-            <a:r>
-              <a:rPr lang="en-US" dirty="0"/>
-              <a:t/>
-            </a:r>
             <a:endParaRPr lang="en-US" dirty="0"/>
           </a:p>
         </p:txBody>
@@ -1220,10 +969,6 @@
           <a:bodyPr/>
           <a:lstStyle/>
           <a:p>
-            <a:r>
-              <a:rPr lang="en-US" dirty="0"/>
-              <a:t/>
-            </a:r>
             <a:endParaRPr lang="en-US" dirty="0"/>
           </a:p>
         </p:txBody>
@@ -1308,10 +1053,6 @@
           <a:bodyPr/>
           <a:lstStyle/>
           <a:p>
-            <a:r>
-              <a:rPr lang="en-US" dirty="0"/>
-              <a:t/>
-            </a:r>
             <a:endParaRPr lang="en-US" dirty="0"/>
           </a:p>
         </p:txBody>
@@ -1396,10 +1137,6 @@
           <a:bodyPr/>
           <a:lstStyle/>
           <a:p>
-            <a:r>
-              <a:rPr lang="en-US" dirty="0"/>
-              <a:t/>
-            </a:r>
             <a:endParaRPr lang="en-US" dirty="0"/>
           </a:p>
         </p:txBody>
@@ -1484,10 +1221,6 @@
           <a:bodyPr/>
           <a:lstStyle/>
           <a:p>
-            <a:r>
-              <a:rPr lang="en-US" dirty="0"/>
-              <a:t/>
-            </a:r>
             <a:endParaRPr lang="en-US" dirty="0"/>
           </a:p>
         </p:txBody>
@@ -1572,10 +1305,6 @@
           <a:bodyPr/>
           <a:lstStyle/>
           <a:p>
-            <a:r>
-              <a:rPr lang="en-US" dirty="0"/>
-              <a:t/>
-            </a:r>
             <a:endParaRPr lang="en-US" dirty="0"/>
           </a:p>
         </p:txBody>
@@ -1660,10 +1389,6 @@
           <a:bodyPr/>
           <a:lstStyle/>
           <a:p>
-            <a:r>
-              <a:rPr lang="en-US" dirty="0"/>
-              <a:t/>
-            </a:r>
             <a:endParaRPr lang="en-US" dirty="0"/>
           </a:p>
         </p:txBody>
@@ -1748,10 +1473,6 @@
           <a:bodyPr/>
           <a:lstStyle/>
           <a:p>
-            <a:r>
-              <a:rPr lang="en-US" dirty="0"/>
-              <a:t/>
-            </a:r>
             <a:endParaRPr lang="en-US" dirty="0"/>
           </a:p>
         </p:txBody>
@@ -1836,10 +1557,6 @@
           <a:bodyPr/>
           <a:lstStyle/>
           <a:p>
-            <a:r>
-              <a:rPr lang="en-US" dirty="0"/>
-              <a:t/>
-            </a:r>
             <a:endParaRPr lang="en-US" dirty="0"/>
           </a:p>
         </p:txBody>
@@ -1924,10 +1641,6 @@
           <a:bodyPr/>
           <a:lstStyle/>
           <a:p>
-            <a:r>
-              <a:rPr lang="en-US" dirty="0"/>
-              <a:t/>
-            </a:r>
             <a:endParaRPr lang="en-US" dirty="0"/>
           </a:p>
         </p:txBody>
@@ -2001,6 +1714,11 @@
 <file path=ppt/slideMasters/slideMaster1.xml><?xml version="1.0" encoding="utf-8"?>
 <p:sldMaster xmlns:a="http://schemas.openxmlformats.org/drawingml/2006/main" xmlns:r="http://schemas.openxmlformats.org/officeDocument/2006/relationships" xmlns:p="http://schemas.openxmlformats.org/presentationml/2006/main">
   <p:cSld>
+    <p:bg>
+      <p:bgRef idx="1001">
+        <a:schemeClr val="bg1"/>
+      </p:bgRef>
+    </p:bg>
     <p:spTree>
       <p:nvGrpSpPr>
         <p:cNvPr id="1" name=""/>
@@ -2283,6 +2001,7 @@
         <a:solidFill>
           <a:srgbClr val="FFFFFF"/>
         </a:solidFill>
+        <a:effectLst/>
       </p:bgPr>
     </p:bg>
     <p:spTree>
@@ -2370,7 +2089,7 @@
           <a:bodyPr wrap="square" rtlCol="0" anchor="ctr"/>
           <a:lstStyle/>
           <a:p>
-            <a:pPr algn="ctr" indent="0" marL="0">
+            <a:pPr marL="0" indent="0" algn="ctr">
               <a:buNone/>
             </a:pPr>
             <a:r>
@@ -2409,7 +2128,7 @@
           <a:bodyPr wrap="square" rtlCol="0" anchor="ctr"/>
           <a:lstStyle/>
           <a:p>
-            <a:pPr indent="0" marL="0">
+            <a:pPr marL="0" indent="0">
               <a:buNone/>
             </a:pPr>
             <a:r>
@@ -2426,7 +2145,7 @@
             <a:endParaRPr lang="en-US" sz="3200" dirty="0"/>
           </a:p>
           <a:p>
-            <a:pPr indent="0" marL="0">
+            <a:pPr marL="0" indent="0">
               <a:buNone/>
             </a:pPr>
             <a:r>
@@ -2490,7 +2209,7 @@
           <a:bodyPr wrap="square" rtlCol="0" anchor="ctr"/>
           <a:lstStyle/>
           <a:p>
-            <a:pPr algn="ctr" indent="0" marL="0">
+            <a:pPr marL="0" indent="0" algn="ctr">
               <a:buNone/>
             </a:pPr>
             <a:r>
@@ -2554,7 +2273,7 @@
           <a:bodyPr wrap="square" rtlCol="0" anchor="ctr"/>
           <a:lstStyle/>
           <a:p>
-            <a:pPr algn="ctr" indent="0" marL="0">
+            <a:pPr marL="0" indent="0" algn="ctr">
               <a:buNone/>
             </a:pPr>
             <a:r>
@@ -2593,7 +2312,7 @@
           <a:bodyPr wrap="square" rtlCol="0" anchor="ctr"/>
           <a:lstStyle/>
           <a:p>
-            <a:pPr algn="ctr" indent="0" marL="0">
+            <a:pPr marL="0" indent="0" algn="ctr">
               <a:buNone/>
             </a:pPr>
             <a:r>
@@ -2605,7 +2324,7 @@
                 <a:ea typeface="Calibri" pitchFamily="34" charset="-122"/>
                 <a:cs typeface="Calibri" pitchFamily="34" charset="-120"/>
               </a:rPr>
-              <a:t>vauldandsouza</a:t>
+              <a:t>Vauldan Dsouza</a:t>
             </a:r>
             <a:endParaRPr lang="en-US" sz="1500" dirty="0"/>
           </a:p>
@@ -2657,7 +2376,7 @@
           <a:bodyPr wrap="square" rtlCol="0" anchor="ctr"/>
           <a:lstStyle/>
           <a:p>
-            <a:pPr algn="ctr" indent="0" marL="0">
+            <a:pPr marL="0" indent="0" algn="ctr">
               <a:buNone/>
             </a:pPr>
             <a:r>
@@ -2696,7 +2415,7 @@
           <a:bodyPr wrap="square" rtlCol="0" anchor="ctr"/>
           <a:lstStyle/>
           <a:p>
-            <a:pPr algn="ctr" indent="0" marL="0">
+            <a:pPr marL="0" indent="0" algn="ctr">
               <a:buNone/>
             </a:pPr>
             <a:r>
@@ -2760,7 +2479,7 @@
           <a:bodyPr wrap="square" rtlCol="0" anchor="ctr"/>
           <a:lstStyle/>
           <a:p>
-            <a:pPr algn="ctr" indent="0" marL="0">
+            <a:pPr marL="0" indent="0" algn="ctr">
               <a:buNone/>
             </a:pPr>
             <a:r>
@@ -2799,7 +2518,7 @@
           <a:bodyPr wrap="square" rtlCol="0" anchor="ctr"/>
           <a:lstStyle/>
           <a:p>
-            <a:pPr algn="ctr" indent="0" marL="0">
+            <a:pPr marL="0" indent="0" algn="ctr">
               <a:buNone/>
             </a:pPr>
             <a:r>
@@ -2863,7 +2582,7 @@
           <a:bodyPr wrap="square" rtlCol="0" anchor="ctr"/>
           <a:lstStyle/>
           <a:p>
-            <a:pPr algn="ctr" indent="0" marL="0">
+            <a:pPr marL="0" indent="0" algn="ctr">
               <a:buNone/>
             </a:pPr>
             <a:r>
@@ -2902,7 +2621,7 @@
           <a:bodyPr wrap="square" rtlCol="0" anchor="ctr"/>
           <a:lstStyle/>
           <a:p>
-            <a:pPr algn="l" indent="0" marL="0">
+            <a:pPr marL="0" indent="0" algn="l">
               <a:buNone/>
             </a:pPr>
             <a:r>
@@ -2941,7 +2660,7 @@
           <a:bodyPr wrap="square" rtlCol="0" anchor="ctr"/>
           <a:lstStyle/>
           <a:p>
-            <a:pPr algn="r" indent="0" marL="0">
+            <a:pPr marL="0" indent="0" algn="r">
               <a:buNone/>
             </a:pPr>
             <a:r>
@@ -2975,6 +2694,7 @@
         <a:solidFill>
           <a:srgbClr val="FFFFFF"/>
         </a:solidFill>
+        <a:effectLst/>
       </p:bgPr>
     </p:bg>
     <p:spTree>
@@ -3012,7 +2732,7 @@
           <a:bodyPr wrap="square" rtlCol="0" anchor="ctr"/>
           <a:lstStyle/>
           <a:p>
-            <a:pPr algn="l" indent="0" marL="0">
+            <a:pPr marL="0" indent="0" algn="l">
               <a:buNone/>
             </a:pPr>
             <a:r>
@@ -3076,7 +2796,7 @@
           <a:bodyPr wrap="square" rtlCol="0" anchor="ctr"/>
           <a:lstStyle/>
           <a:p>
-            <a:pPr indent="0" marL="0">
+            <a:pPr marL="0" indent="0">
               <a:buNone/>
             </a:pPr>
             <a:r>
@@ -3190,7 +2910,7 @@
           <a:bodyPr wrap="square" rtlCol="0" anchor="ctr"/>
           <a:lstStyle/>
           <a:p>
-            <a:pPr indent="0" marL="0">
+            <a:pPr marL="0" indent="0">
               <a:buNone/>
             </a:pPr>
             <a:r>
@@ -3229,7 +2949,7 @@
           <a:bodyPr wrap="square" rtlCol="0" anchor="ctr"/>
           <a:lstStyle/>
           <a:p>
-            <a:pPr indent="0" marL="0">
+            <a:pPr marL="0" indent="0">
               <a:buNone/>
             </a:pPr>
             <a:r>
@@ -3268,7 +2988,7 @@
           <a:bodyPr wrap="square" rtlCol="0" anchor="ctr"/>
           <a:lstStyle/>
           <a:p>
-            <a:pPr algn="r" indent="0" marL="0">
+            <a:pPr marL="0" indent="0" algn="r">
               <a:buNone/>
             </a:pPr>
             <a:r>
@@ -3382,7 +3102,7 @@
           <a:bodyPr wrap="square" rtlCol="0" anchor="ctr"/>
           <a:lstStyle/>
           <a:p>
-            <a:pPr indent="0" marL="0">
+            <a:pPr marL="0" indent="0">
               <a:buNone/>
             </a:pPr>
             <a:r>
@@ -3421,7 +3141,7 @@
           <a:bodyPr wrap="square" rtlCol="0" anchor="ctr"/>
           <a:lstStyle/>
           <a:p>
-            <a:pPr indent="0" marL="0">
+            <a:pPr marL="0" indent="0">
               <a:buNone/>
             </a:pPr>
             <a:r>
@@ -3460,7 +3180,7 @@
           <a:bodyPr wrap="square" rtlCol="0" anchor="ctr"/>
           <a:lstStyle/>
           <a:p>
-            <a:pPr algn="r" indent="0" marL="0">
+            <a:pPr marL="0" indent="0" algn="r">
               <a:buNone/>
             </a:pPr>
             <a:r>
@@ -3574,7 +3294,7 @@
           <a:bodyPr wrap="square" rtlCol="0" anchor="ctr"/>
           <a:lstStyle/>
           <a:p>
-            <a:pPr indent="0" marL="0">
+            <a:pPr marL="0" indent="0">
               <a:buNone/>
             </a:pPr>
             <a:r>
@@ -3613,7 +3333,7 @@
           <a:bodyPr wrap="square" rtlCol="0" anchor="ctr"/>
           <a:lstStyle/>
           <a:p>
-            <a:pPr indent="0" marL="0">
+            <a:pPr marL="0" indent="0">
               <a:buNone/>
             </a:pPr>
             <a:r>
@@ -3652,7 +3372,7 @@
           <a:bodyPr wrap="square" rtlCol="0" anchor="ctr"/>
           <a:lstStyle/>
           <a:p>
-            <a:pPr algn="r" indent="0" marL="0">
+            <a:pPr marL="0" indent="0" algn="r">
               <a:buNone/>
             </a:pPr>
             <a:r>
@@ -3766,7 +3486,7 @@
           <a:bodyPr wrap="square" rtlCol="0" anchor="ctr"/>
           <a:lstStyle/>
           <a:p>
-            <a:pPr indent="0" marL="0">
+            <a:pPr marL="0" indent="0">
               <a:buNone/>
             </a:pPr>
             <a:r>
@@ -3805,7 +3525,7 @@
           <a:bodyPr wrap="square" rtlCol="0" anchor="ctr"/>
           <a:lstStyle/>
           <a:p>
-            <a:pPr indent="0" marL="0">
+            <a:pPr marL="0" indent="0">
               <a:buNone/>
             </a:pPr>
             <a:r>
@@ -3844,7 +3564,7 @@
           <a:bodyPr wrap="square" rtlCol="0" anchor="ctr"/>
           <a:lstStyle/>
           <a:p>
-            <a:pPr algn="r" indent="0" marL="0">
+            <a:pPr marL="0" indent="0" algn="r">
               <a:buNone/>
             </a:pPr>
             <a:r>
@@ -3958,7 +3678,7 @@
           <a:bodyPr wrap="square" rtlCol="0" anchor="ctr"/>
           <a:lstStyle/>
           <a:p>
-            <a:pPr indent="0" marL="0">
+            <a:pPr marL="0" indent="0">
               <a:buNone/>
             </a:pPr>
             <a:r>
@@ -3997,7 +3717,7 @@
           <a:bodyPr wrap="square" rtlCol="0" anchor="ctr"/>
           <a:lstStyle/>
           <a:p>
-            <a:pPr indent="0" marL="0">
+            <a:pPr marL="0" indent="0">
               <a:buNone/>
             </a:pPr>
             <a:r>
@@ -4036,7 +3756,7 @@
           <a:bodyPr wrap="square" rtlCol="0" anchor="ctr"/>
           <a:lstStyle/>
           <a:p>
-            <a:pPr algn="r" indent="0" marL="0">
+            <a:pPr marL="0" indent="0" algn="r">
               <a:buNone/>
             </a:pPr>
             <a:r>
@@ -4075,7 +3795,7 @@
           <a:bodyPr wrap="square" rtlCol="0" anchor="ctr"/>
           <a:lstStyle/>
           <a:p>
-            <a:pPr indent="0" marL="0">
+            <a:pPr marL="0" indent="0">
               <a:buNone/>
             </a:pPr>
             <a:r>
@@ -4139,7 +3859,7 @@
           <a:bodyPr wrap="square" rtlCol="0" anchor="ctr"/>
           <a:lstStyle/>
           <a:p>
-            <a:pPr indent="0" marL="0">
+            <a:pPr marL="0" indent="0">
               <a:buNone/>
             </a:pPr>
             <a:r>
@@ -4178,7 +3898,7 @@
           <a:bodyPr wrap="square" rtlCol="0" anchor="ctr"/>
           <a:lstStyle/>
           <a:p>
-            <a:pPr indent="0" marL="0">
+            <a:pPr marL="0" indent="0">
               <a:buNone/>
             </a:pPr>
             <a:r>
@@ -4217,7 +3937,7 @@
           <a:bodyPr wrap="square" rtlCol="0" anchor="ctr"/>
           <a:lstStyle/>
           <a:p>
-            <a:pPr indent="0" marL="0">
+            <a:pPr marL="0" indent="0">
               <a:buNone/>
             </a:pPr>
             <a:r>
@@ -4281,7 +4001,7 @@
           <a:bodyPr wrap="square" rtlCol="0" anchor="ctr"/>
           <a:lstStyle/>
           <a:p>
-            <a:pPr indent="0" marL="0">
+            <a:pPr marL="0" indent="0">
               <a:buNone/>
             </a:pPr>
             <a:r>
@@ -4320,7 +4040,7 @@
           <a:bodyPr wrap="square" rtlCol="0" anchor="ctr"/>
           <a:lstStyle/>
           <a:p>
-            <a:pPr indent="0" marL="0">
+            <a:pPr marL="0" indent="0">
               <a:buNone/>
             </a:pPr>
             <a:r>
@@ -4359,7 +4079,7 @@
           <a:bodyPr wrap="square" rtlCol="0" anchor="ctr"/>
           <a:lstStyle/>
           <a:p>
-            <a:pPr indent="0" marL="0">
+            <a:pPr marL="0" indent="0">
               <a:buNone/>
             </a:pPr>
             <a:r>
@@ -4423,7 +4143,7 @@
           <a:bodyPr wrap="square" rtlCol="0" anchor="ctr"/>
           <a:lstStyle/>
           <a:p>
-            <a:pPr indent="0" marL="0">
+            <a:pPr marL="0" indent="0">
               <a:buNone/>
             </a:pPr>
             <a:r>
@@ -4462,7 +4182,7 @@
           <a:bodyPr wrap="square" rtlCol="0" anchor="ctr"/>
           <a:lstStyle/>
           <a:p>
-            <a:pPr indent="0" marL="0">
+            <a:pPr marL="0" indent="0">
               <a:buNone/>
             </a:pPr>
             <a:r>
@@ -4501,7 +4221,7 @@
           <a:bodyPr wrap="square" rtlCol="0" anchor="ctr"/>
           <a:lstStyle/>
           <a:p>
-            <a:pPr indent="0" marL="0">
+            <a:pPr marL="0" indent="0">
               <a:buNone/>
             </a:pPr>
             <a:r>
@@ -4565,7 +4285,7 @@
           <a:bodyPr wrap="square" rtlCol="0" anchor="ctr"/>
           <a:lstStyle/>
           <a:p>
-            <a:pPr indent="0" marL="0">
+            <a:pPr marL="0" indent="0">
               <a:buNone/>
             </a:pPr>
             <a:r>
@@ -4604,7 +4324,7 @@
           <a:bodyPr wrap="square" rtlCol="0" anchor="ctr"/>
           <a:lstStyle/>
           <a:p>
-            <a:pPr indent="0" marL="0">
+            <a:pPr marL="0" indent="0">
               <a:buNone/>
             </a:pPr>
             <a:r>
@@ -4643,7 +4363,7 @@
           <a:bodyPr wrap="square" rtlCol="0" anchor="ctr"/>
           <a:lstStyle/>
           <a:p>
-            <a:pPr indent="0" marL="0">
+            <a:pPr marL="0" indent="0">
               <a:buNone/>
             </a:pPr>
             <a:r>
@@ -4682,7 +4402,7 @@
           <a:bodyPr wrap="square" rtlCol="0" anchor="ctr"/>
           <a:lstStyle/>
           <a:p>
-            <a:pPr algn="l" indent="0" marL="0">
+            <a:pPr marL="0" indent="0" algn="l">
               <a:buNone/>
             </a:pPr>
             <a:r>
@@ -4721,7 +4441,7 @@
           <a:bodyPr wrap="square" rtlCol="0" anchor="ctr"/>
           <a:lstStyle/>
           <a:p>
-            <a:pPr algn="r" indent="0" marL="0">
+            <a:pPr marL="0" indent="0" algn="r">
               <a:buNone/>
             </a:pPr>
             <a:r>
@@ -4755,6 +4475,7 @@
         <a:solidFill>
           <a:srgbClr val="FFFFFF"/>
         </a:solidFill>
+        <a:effectLst/>
       </p:bgPr>
     </p:bg>
     <p:spTree>
@@ -4792,7 +4513,7 @@
           <a:bodyPr wrap="square" rtlCol="0" anchor="ctr"/>
           <a:lstStyle/>
           <a:p>
-            <a:pPr algn="l" indent="0" marL="0">
+            <a:pPr marL="0" indent="0" algn="l">
               <a:buNone/>
             </a:pPr>
             <a:r>
@@ -4881,7 +4602,7 @@
           <a:bodyPr wrap="square" rtlCol="0" anchor="ctr"/>
           <a:lstStyle/>
           <a:p>
-            <a:pPr algn="ctr" indent="0" marL="0">
+            <a:pPr marL="0" indent="0" algn="ctr">
               <a:buNone/>
             </a:pPr>
             <a:r>
@@ -4970,7 +4691,7 @@
           <a:bodyPr wrap="square" rtlCol="0" anchor="ctr"/>
           <a:lstStyle/>
           <a:p>
-            <a:pPr indent="0" marL="0">
+            <a:pPr marL="0" indent="0">
               <a:buNone/>
             </a:pPr>
             <a:r>
@@ -5034,7 +4755,7 @@
           <a:bodyPr wrap="square" rtlCol="0" anchor="ctr"/>
           <a:lstStyle/>
           <a:p>
-            <a:pPr indent="0" marL="0">
+            <a:pPr marL="0" indent="0">
               <a:buNone/>
             </a:pPr>
             <a:r>
@@ -5098,7 +4819,7 @@
           <a:bodyPr wrap="square" rtlCol="0" anchor="ctr"/>
           <a:lstStyle/>
           <a:p>
-            <a:pPr indent="0" marL="0">
+            <a:pPr marL="0" indent="0">
               <a:buNone/>
             </a:pPr>
             <a:r>
@@ -5162,7 +4883,7 @@
           <a:bodyPr wrap="square" rtlCol="0" anchor="ctr"/>
           <a:lstStyle/>
           <a:p>
-            <a:pPr indent="0" marL="0">
+            <a:pPr marL="0" indent="0">
               <a:buNone/>
             </a:pPr>
             <a:r>
@@ -5226,7 +4947,7 @@
           <a:bodyPr wrap="square" rtlCol="0" anchor="ctr"/>
           <a:lstStyle/>
           <a:p>
-            <a:pPr algn="ctr" indent="0" marL="0">
+            <a:pPr marL="0" indent="0" algn="ctr">
               <a:buNone/>
             </a:pPr>
             <a:r>
@@ -5315,7 +5036,7 @@
           <a:bodyPr wrap="square" rtlCol="0" anchor="ctr"/>
           <a:lstStyle/>
           <a:p>
-            <a:pPr indent="0" marL="0">
+            <a:pPr marL="0" indent="0">
               <a:buNone/>
             </a:pPr>
             <a:r>
@@ -5379,7 +5100,7 @@
           <a:bodyPr wrap="square" rtlCol="0" anchor="ctr"/>
           <a:lstStyle/>
           <a:p>
-            <a:pPr indent="0" marL="0">
+            <a:pPr marL="0" indent="0">
               <a:buNone/>
             </a:pPr>
             <a:r>
@@ -5443,7 +5164,7 @@
           <a:bodyPr wrap="square" rtlCol="0" anchor="ctr"/>
           <a:lstStyle/>
           <a:p>
-            <a:pPr indent="0" marL="0">
+            <a:pPr marL="0" indent="0">
               <a:buNone/>
             </a:pPr>
             <a:r>
@@ -5507,7 +5228,7 @@
           <a:bodyPr wrap="square" rtlCol="0" anchor="ctr"/>
           <a:lstStyle/>
           <a:p>
-            <a:pPr indent="0" marL="0">
+            <a:pPr marL="0" indent="0">
               <a:buNone/>
             </a:pPr>
             <a:r>
@@ -5571,7 +5292,7 @@
           <a:bodyPr wrap="square" rtlCol="0" anchor="ctr"/>
           <a:lstStyle/>
           <a:p>
-            <a:pPr algn="ctr" indent="0" marL="0">
+            <a:pPr marL="0" indent="0" algn="ctr">
               <a:buNone/>
             </a:pPr>
             <a:r>
@@ -5660,7 +5381,7 @@
           <a:bodyPr wrap="square" rtlCol="0" anchor="ctr"/>
           <a:lstStyle/>
           <a:p>
-            <a:pPr indent="0" marL="0">
+            <a:pPr marL="0" indent="0">
               <a:buNone/>
             </a:pPr>
             <a:r>
@@ -5724,7 +5445,7 @@
           <a:bodyPr wrap="square" rtlCol="0" anchor="ctr"/>
           <a:lstStyle/>
           <a:p>
-            <a:pPr indent="0" marL="0">
+            <a:pPr marL="0" indent="0">
               <a:buNone/>
             </a:pPr>
             <a:r>
@@ -5788,7 +5509,7 @@
           <a:bodyPr wrap="square" rtlCol="0" anchor="ctr"/>
           <a:lstStyle/>
           <a:p>
-            <a:pPr indent="0" marL="0">
+            <a:pPr marL="0" indent="0">
               <a:buNone/>
             </a:pPr>
             <a:r>
@@ -5852,7 +5573,7 @@
           <a:bodyPr wrap="square" rtlCol="0" anchor="ctr"/>
           <a:lstStyle/>
           <a:p>
-            <a:pPr indent="0" marL="0">
+            <a:pPr marL="0" indent="0">
               <a:buNone/>
             </a:pPr>
             <a:r>
@@ -5891,7 +5612,7 @@
           <a:bodyPr wrap="square" rtlCol="0" anchor="ctr"/>
           <a:lstStyle/>
           <a:p>
-            <a:pPr algn="l" indent="0" marL="0">
+            <a:pPr marL="0" indent="0" algn="l">
               <a:buNone/>
             </a:pPr>
             <a:r>
@@ -5930,7 +5651,7 @@
           <a:bodyPr wrap="square" rtlCol="0" anchor="ctr"/>
           <a:lstStyle/>
           <a:p>
-            <a:pPr algn="r" indent="0" marL="0">
+            <a:pPr marL="0" indent="0" algn="r">
               <a:buNone/>
             </a:pPr>
             <a:r>
@@ -5964,6 +5685,7 @@
         <a:solidFill>
           <a:srgbClr val="FFFFFF"/>
         </a:solidFill>
+        <a:effectLst/>
       </p:bgPr>
     </p:bg>
     <p:spTree>
@@ -6001,7 +5723,7 @@
           <a:bodyPr wrap="square" rtlCol="0" anchor="ctr"/>
           <a:lstStyle/>
           <a:p>
-            <a:pPr algn="l" indent="0" marL="0">
+            <a:pPr marL="0" indent="0" algn="l">
               <a:buNone/>
             </a:pPr>
             <a:r>
@@ -6068,7 +5790,7 @@
             <a:prstDash val="solid"/>
           </a:ln>
           <a:effectLst>
-            <a:outerShdw sx="100000" sy="100000" kx="0" ky="0" algn="bl" rotWithShape="0" blurRad="63500" dist="25400" dir="8100000">
+            <a:outerShdw blurRad="63500" dist="25400" dir="8100000" algn="bl" rotWithShape="0">
               <a:srgbClr val="000000">
                 <a:alpha val="8000"/>
               </a:srgbClr>
@@ -6097,7 +5819,7 @@
           <a:bodyPr wrap="square" rtlCol="0" anchor="ctr"/>
           <a:lstStyle/>
           <a:p>
-            <a:pPr algn="ctr" indent="0" marL="0">
+            <a:pPr marL="0" indent="0" algn="ctr">
               <a:buNone/>
             </a:pPr>
             <a:r>
@@ -6136,7 +5858,7 @@
           <a:bodyPr wrap="square" rtlCol="0" anchor="ctr"/>
           <a:lstStyle/>
           <a:p>
-            <a:pPr indent="0" marL="0">
+            <a:pPr marL="0" indent="0">
               <a:buNone/>
             </a:pPr>
             <a:r>
@@ -6175,7 +5897,7 @@
           <a:bodyPr wrap="square" rtlCol="0" anchor="ctr"/>
           <a:lstStyle/>
           <a:p>
-            <a:pPr indent="0" marL="0">
+            <a:pPr marL="0" indent="0">
               <a:buNone/>
             </a:pPr>
             <a:r>
@@ -6214,7 +5936,7 @@
           <a:bodyPr wrap="square" rtlCol="0" anchor="ctr"/>
           <a:lstStyle/>
           <a:p>
-            <a:pPr indent="0" marL="0">
+            <a:pPr marL="0" indent="0">
               <a:buNone/>
             </a:pPr>
             <a:r>
@@ -6256,7 +5978,7 @@
             <a:prstDash val="solid"/>
           </a:ln>
           <a:effectLst>
-            <a:outerShdw sx="100000" sy="100000" kx="0" ky="0" algn="bl" rotWithShape="0" blurRad="63500" dist="25400" dir="8100000">
+            <a:outerShdw blurRad="63500" dist="25400" dir="8100000" algn="bl" rotWithShape="0">
               <a:srgbClr val="000000">
                 <a:alpha val="8000"/>
               </a:srgbClr>
@@ -6285,7 +6007,7 @@
           <a:bodyPr wrap="square" rtlCol="0" anchor="ctr"/>
           <a:lstStyle/>
           <a:p>
-            <a:pPr algn="ctr" indent="0" marL="0">
+            <a:pPr marL="0" indent="0" algn="ctr">
               <a:buNone/>
             </a:pPr>
             <a:r>
@@ -6324,7 +6046,7 @@
           <a:bodyPr wrap="square" rtlCol="0" anchor="ctr"/>
           <a:lstStyle/>
           <a:p>
-            <a:pPr indent="0" marL="0">
+            <a:pPr marL="0" indent="0">
               <a:buNone/>
             </a:pPr>
             <a:r>
@@ -6363,7 +6085,7 @@
           <a:bodyPr wrap="square" rtlCol="0" anchor="ctr"/>
           <a:lstStyle/>
           <a:p>
-            <a:pPr indent="0" marL="0">
+            <a:pPr marL="0" indent="0">
               <a:buNone/>
             </a:pPr>
             <a:r>
@@ -6402,7 +6124,7 @@
           <a:bodyPr wrap="square" rtlCol="0" anchor="ctr"/>
           <a:lstStyle/>
           <a:p>
-            <a:pPr indent="0" marL="0">
+            <a:pPr marL="0" indent="0">
               <a:buNone/>
             </a:pPr>
             <a:r>
@@ -6444,7 +6166,7 @@
             <a:prstDash val="solid"/>
           </a:ln>
           <a:effectLst>
-            <a:outerShdw sx="100000" sy="100000" kx="0" ky="0" algn="bl" rotWithShape="0" blurRad="63500" dist="25400" dir="8100000">
+            <a:outerShdw blurRad="63500" dist="25400" dir="8100000" algn="bl" rotWithShape="0">
               <a:srgbClr val="000000">
                 <a:alpha val="8000"/>
               </a:srgbClr>
@@ -6473,7 +6195,7 @@
           <a:bodyPr wrap="square" rtlCol="0" anchor="ctr"/>
           <a:lstStyle/>
           <a:p>
-            <a:pPr algn="ctr" indent="0" marL="0">
+            <a:pPr marL="0" indent="0" algn="ctr">
               <a:buNone/>
             </a:pPr>
             <a:r>
@@ -6512,7 +6234,7 @@
           <a:bodyPr wrap="square" rtlCol="0" anchor="ctr"/>
           <a:lstStyle/>
           <a:p>
-            <a:pPr indent="0" marL="0">
+            <a:pPr marL="0" indent="0">
               <a:buNone/>
             </a:pPr>
             <a:r>
@@ -6551,7 +6273,7 @@
           <a:bodyPr wrap="square" rtlCol="0" anchor="ctr"/>
           <a:lstStyle/>
           <a:p>
-            <a:pPr indent="0" marL="0">
+            <a:pPr marL="0" indent="0">
               <a:buNone/>
             </a:pPr>
             <a:r>
@@ -6590,7 +6312,7 @@
           <a:bodyPr wrap="square" rtlCol="0" anchor="ctr"/>
           <a:lstStyle/>
           <a:p>
-            <a:pPr indent="0" marL="0">
+            <a:pPr marL="0" indent="0">
               <a:buNone/>
             </a:pPr>
             <a:r>
@@ -6632,7 +6354,7 @@
             <a:prstDash val="solid"/>
           </a:ln>
           <a:effectLst>
-            <a:outerShdw sx="100000" sy="100000" kx="0" ky="0" algn="bl" rotWithShape="0" blurRad="63500" dist="25400" dir="8100000">
+            <a:outerShdw blurRad="63500" dist="25400" dir="8100000" algn="bl" rotWithShape="0">
               <a:srgbClr val="000000">
                 <a:alpha val="8000"/>
               </a:srgbClr>
@@ -6661,7 +6383,7 @@
           <a:bodyPr wrap="square" rtlCol="0" anchor="ctr"/>
           <a:lstStyle/>
           <a:p>
-            <a:pPr algn="ctr" indent="0" marL="0">
+            <a:pPr marL="0" indent="0" algn="ctr">
               <a:buNone/>
             </a:pPr>
             <a:r>
@@ -6700,7 +6422,7 @@
           <a:bodyPr wrap="square" rtlCol="0" anchor="ctr"/>
           <a:lstStyle/>
           <a:p>
-            <a:pPr indent="0" marL="0">
+            <a:pPr marL="0" indent="0">
               <a:buNone/>
             </a:pPr>
             <a:r>
@@ -6739,7 +6461,7 @@
           <a:bodyPr wrap="square" rtlCol="0" anchor="ctr"/>
           <a:lstStyle/>
           <a:p>
-            <a:pPr indent="0" marL="0">
+            <a:pPr marL="0" indent="0">
               <a:buNone/>
             </a:pPr>
             <a:r>
@@ -6778,7 +6500,7 @@
           <a:bodyPr wrap="square" rtlCol="0" anchor="ctr"/>
           <a:lstStyle/>
           <a:p>
-            <a:pPr indent="0" marL="0">
+            <a:pPr marL="0" indent="0">
               <a:buNone/>
             </a:pPr>
             <a:r>
@@ -6820,7 +6542,7 @@
             <a:prstDash val="solid"/>
           </a:ln>
           <a:effectLst>
-            <a:outerShdw sx="100000" sy="100000" kx="0" ky="0" algn="bl" rotWithShape="0" blurRad="63500" dist="25400" dir="8100000">
+            <a:outerShdw blurRad="63500" dist="25400" dir="8100000" algn="bl" rotWithShape="0">
               <a:srgbClr val="000000">
                 <a:alpha val="8000"/>
               </a:srgbClr>
@@ -6849,7 +6571,7 @@
           <a:bodyPr wrap="square" rtlCol="0" anchor="ctr"/>
           <a:lstStyle/>
           <a:p>
-            <a:pPr algn="ctr" indent="0" marL="0">
+            <a:pPr marL="0" indent="0" algn="ctr">
               <a:buNone/>
             </a:pPr>
             <a:r>
@@ -6888,7 +6610,7 @@
           <a:bodyPr wrap="square" rtlCol="0" anchor="ctr"/>
           <a:lstStyle/>
           <a:p>
-            <a:pPr indent="0" marL="0">
+            <a:pPr marL="0" indent="0">
               <a:buNone/>
             </a:pPr>
             <a:r>
@@ -6927,7 +6649,7 @@
           <a:bodyPr wrap="square" rtlCol="0" anchor="ctr"/>
           <a:lstStyle/>
           <a:p>
-            <a:pPr indent="0" marL="0">
+            <a:pPr marL="0" indent="0">
               <a:buNone/>
             </a:pPr>
             <a:r>
@@ -6966,7 +6688,7 @@
           <a:bodyPr wrap="square" rtlCol="0" anchor="ctr"/>
           <a:lstStyle/>
           <a:p>
-            <a:pPr indent="0" marL="0">
+            <a:pPr marL="0" indent="0">
               <a:buNone/>
             </a:pPr>
             <a:r>
@@ -7005,7 +6727,7 @@
           <a:bodyPr wrap="square" rtlCol="0" anchor="ctr"/>
           <a:lstStyle/>
           <a:p>
-            <a:pPr algn="l" indent="0" marL="0">
+            <a:pPr marL="0" indent="0" algn="l">
               <a:buNone/>
             </a:pPr>
             <a:r>
@@ -7044,7 +6766,7 @@
           <a:bodyPr wrap="square" rtlCol="0" anchor="ctr"/>
           <a:lstStyle/>
           <a:p>
-            <a:pPr algn="r" indent="0" marL="0">
+            <a:pPr marL="0" indent="0" algn="r">
               <a:buNone/>
             </a:pPr>
             <a:r>
@@ -7078,6 +6800,7 @@
         <a:solidFill>
           <a:srgbClr val="FFFFFF"/>
         </a:solidFill>
+        <a:effectLst/>
       </p:bgPr>
     </p:bg>
     <p:spTree>
@@ -7115,7 +6838,7 @@
           <a:bodyPr wrap="square" rtlCol="0" anchor="ctr"/>
           <a:lstStyle/>
           <a:p>
-            <a:pPr algn="l" indent="0" marL="0">
+            <a:pPr marL="0" indent="0" algn="l">
               <a:buNone/>
             </a:pPr>
             <a:r>
@@ -7229,7 +6952,7 @@
           <a:bodyPr wrap="square" rtlCol="0" anchor="ctr"/>
           <a:lstStyle/>
           <a:p>
-            <a:pPr indent="0" marL="0">
+            <a:pPr marL="0" indent="0">
               <a:buNone/>
             </a:pPr>
             <a:r>
@@ -7268,7 +6991,7 @@
           <a:bodyPr wrap="square" rtlCol="0" anchor="ctr"/>
           <a:lstStyle/>
           <a:p>
-            <a:pPr indent="0" marL="0">
+            <a:pPr marL="0" indent="0">
               <a:buNone/>
             </a:pPr>
             <a:r>
@@ -7307,7 +7030,7 @@
           <a:bodyPr wrap="square" rtlCol="0" anchor="ctr"/>
           <a:lstStyle/>
           <a:p>
-            <a:pPr algn="ctr" indent="0" marL="0">
+            <a:pPr marL="0" indent="0" algn="ctr">
               <a:buNone/>
             </a:pPr>
             <a:r>
@@ -7396,7 +7119,7 @@
           <a:bodyPr wrap="square" rtlCol="0" anchor="ctr"/>
           <a:lstStyle/>
           <a:p>
-            <a:pPr indent="0" marL="0">
+            <a:pPr marL="0" indent="0">
               <a:buNone/>
             </a:pPr>
             <a:r>
@@ -7435,7 +7158,7 @@
           <a:bodyPr wrap="square" rtlCol="0" anchor="ctr"/>
           <a:lstStyle/>
           <a:p>
-            <a:pPr indent="0" marL="0">
+            <a:pPr marL="0" indent="0">
               <a:buNone/>
             </a:pPr>
             <a:r>
@@ -7524,7 +7247,7 @@
           <a:bodyPr wrap="square" rtlCol="0" anchor="ctr"/>
           <a:lstStyle/>
           <a:p>
-            <a:pPr indent="0" marL="0">
+            <a:pPr marL="0" indent="0">
               <a:buNone/>
             </a:pPr>
             <a:r>
@@ -7563,7 +7286,7 @@
           <a:bodyPr wrap="square" rtlCol="0" anchor="ctr"/>
           <a:lstStyle/>
           <a:p>
-            <a:pPr indent="0" marL="0">
+            <a:pPr marL="0" indent="0">
               <a:buNone/>
             </a:pPr>
             <a:r>
@@ -7602,7 +7325,7 @@
           <a:bodyPr wrap="square" rtlCol="0" anchor="ctr"/>
           <a:lstStyle/>
           <a:p>
-            <a:pPr algn="ctr" indent="0" marL="0">
+            <a:pPr marL="0" indent="0" algn="ctr">
               <a:buNone/>
             </a:pPr>
             <a:r>
@@ -7691,7 +7414,7 @@
           <a:bodyPr wrap="square" rtlCol="0" anchor="ctr"/>
           <a:lstStyle/>
           <a:p>
-            <a:pPr indent="0" marL="0">
+            <a:pPr marL="0" indent="0">
               <a:buNone/>
             </a:pPr>
             <a:r>
@@ -7730,7 +7453,7 @@
           <a:bodyPr wrap="square" rtlCol="0" anchor="ctr"/>
           <a:lstStyle/>
           <a:p>
-            <a:pPr indent="0" marL="0">
+            <a:pPr marL="0" indent="0">
               <a:buNone/>
             </a:pPr>
             <a:r>
@@ -7819,7 +7542,7 @@
           <a:bodyPr wrap="square" rtlCol="0" anchor="ctr"/>
           <a:lstStyle/>
           <a:p>
-            <a:pPr indent="0" marL="0">
+            <a:pPr marL="0" indent="0">
               <a:buNone/>
             </a:pPr>
             <a:r>
@@ -7858,7 +7581,7 @@
           <a:bodyPr wrap="square" rtlCol="0" anchor="ctr"/>
           <a:lstStyle/>
           <a:p>
-            <a:pPr indent="0" marL="0">
+            <a:pPr marL="0" indent="0">
               <a:buNone/>
             </a:pPr>
             <a:r>
@@ -7897,7 +7620,7 @@
           <a:bodyPr wrap="square" rtlCol="0" anchor="ctr"/>
           <a:lstStyle/>
           <a:p>
-            <a:pPr algn="ctr" indent="0" marL="0">
+            <a:pPr marL="0" indent="0" algn="ctr">
               <a:buNone/>
             </a:pPr>
             <a:r>
@@ -7986,7 +7709,7 @@
           <a:bodyPr wrap="square" rtlCol="0" anchor="ctr"/>
           <a:lstStyle/>
           <a:p>
-            <a:pPr indent="0" marL="0">
+            <a:pPr marL="0" indent="0">
               <a:buNone/>
             </a:pPr>
             <a:r>
@@ -8025,7 +7748,7 @@
           <a:bodyPr wrap="square" rtlCol="0" anchor="ctr"/>
           <a:lstStyle/>
           <a:p>
-            <a:pPr indent="0" marL="0">
+            <a:pPr marL="0" indent="0">
               <a:buNone/>
             </a:pPr>
             <a:r>
@@ -8114,7 +7837,7 @@
           <a:bodyPr wrap="square" rtlCol="0" anchor="ctr"/>
           <a:lstStyle/>
           <a:p>
-            <a:pPr indent="0" marL="0">
+            <a:pPr marL="0" indent="0">
               <a:buNone/>
             </a:pPr>
             <a:r>
@@ -8153,7 +7876,7 @@
           <a:bodyPr wrap="square" rtlCol="0" anchor="ctr"/>
           <a:lstStyle/>
           <a:p>
-            <a:pPr indent="0" marL="0">
+            <a:pPr marL="0" indent="0">
               <a:buNone/>
             </a:pPr>
             <a:r>
@@ -8192,7 +7915,7 @@
           <a:bodyPr wrap="square" rtlCol="0" anchor="ctr"/>
           <a:lstStyle/>
           <a:p>
-            <a:pPr algn="ctr" indent="0" marL="0">
+            <a:pPr marL="0" indent="0" algn="ctr">
               <a:buNone/>
             </a:pPr>
             <a:r>
@@ -8281,7 +8004,7 @@
           <a:bodyPr wrap="square" rtlCol="0" anchor="ctr"/>
           <a:lstStyle/>
           <a:p>
-            <a:pPr indent="0" marL="0">
+            <a:pPr marL="0" indent="0">
               <a:buNone/>
             </a:pPr>
             <a:r>
@@ -8320,7 +8043,7 @@
           <a:bodyPr wrap="square" rtlCol="0" anchor="ctr"/>
           <a:lstStyle/>
           <a:p>
-            <a:pPr indent="0" marL="0">
+            <a:pPr marL="0" indent="0">
               <a:buNone/>
             </a:pPr>
             <a:r>
@@ -8359,7 +8082,7 @@
           <a:bodyPr wrap="square" rtlCol="0" anchor="ctr"/>
           <a:lstStyle/>
           <a:p>
-            <a:pPr algn="l" indent="0" marL="0">
+            <a:pPr marL="0" indent="0" algn="l">
               <a:buNone/>
             </a:pPr>
             <a:r>
@@ -8398,7 +8121,7 @@
           <a:bodyPr wrap="square" rtlCol="0" anchor="ctr"/>
           <a:lstStyle/>
           <a:p>
-            <a:pPr algn="r" indent="0" marL="0">
+            <a:pPr marL="0" indent="0" algn="r">
               <a:buNone/>
             </a:pPr>
             <a:r>
@@ -8432,6 +8155,7 @@
         <a:solidFill>
           <a:srgbClr val="FFFFFF"/>
         </a:solidFill>
+        <a:effectLst/>
       </p:bgPr>
     </p:bg>
     <p:spTree>
@@ -8469,7 +8193,7 @@
           <a:bodyPr wrap="square" rtlCol="0" anchor="ctr"/>
           <a:lstStyle/>
           <a:p>
-            <a:pPr algn="l" indent="0" marL="0">
+            <a:pPr marL="0" indent="0" algn="l">
               <a:buNone/>
             </a:pPr>
             <a:r>
@@ -8536,7 +8260,7 @@
             <a:prstDash val="solid"/>
           </a:ln>
           <a:effectLst>
-            <a:outerShdw sx="100000" sy="100000" kx="0" ky="0" algn="bl" rotWithShape="0" blurRad="50800" dist="12700" dir="8100000">
+            <a:outerShdw blurRad="50800" dist="12700" dir="8100000" algn="bl" rotWithShape="0">
               <a:srgbClr val="000000">
                 <a:alpha val="7000"/>
               </a:srgbClr>
@@ -8565,7 +8289,7 @@
           <a:bodyPr wrap="square" rtlCol="0" anchor="ctr"/>
           <a:lstStyle/>
           <a:p>
-            <a:pPr indent="0" marL="0">
+            <a:pPr marL="0" indent="0">
               <a:buNone/>
             </a:pPr>
             <a:r>
@@ -8604,7 +8328,7 @@
           <a:bodyPr wrap="square" rtlCol="0" anchor="ctr"/>
           <a:lstStyle/>
           <a:p>
-            <a:pPr indent="0" marL="0">
+            <a:pPr marL="0" indent="0">
               <a:buNone/>
             </a:pPr>
             <a:r>
@@ -8668,7 +8392,7 @@
           <a:bodyPr wrap="square" rtlCol="0" anchor="ctr"/>
           <a:lstStyle/>
           <a:p>
-            <a:pPr indent="0" marL="0">
+            <a:pPr marL="0" indent="0">
               <a:buNone/>
             </a:pPr>
             <a:r>
@@ -8707,7 +8431,7 @@
           <a:bodyPr wrap="square" rtlCol="0" anchor="ctr"/>
           <a:lstStyle/>
           <a:p>
-            <a:pPr indent="0" marL="0">
+            <a:pPr marL="0" indent="0">
               <a:buNone/>
             </a:pPr>
             <a:r>
@@ -8749,7 +8473,7 @@
             <a:prstDash val="solid"/>
           </a:ln>
           <a:effectLst>
-            <a:outerShdw sx="100000" sy="100000" kx="0" ky="0" algn="bl" rotWithShape="0" blurRad="50800" dist="12700" dir="8100000">
+            <a:outerShdw blurRad="50800" dist="12700" dir="8100000" algn="bl" rotWithShape="0">
               <a:srgbClr val="000000">
                 <a:alpha val="7000"/>
               </a:srgbClr>
@@ -8778,7 +8502,7 @@
           <a:bodyPr wrap="square" rtlCol="0" anchor="ctr"/>
           <a:lstStyle/>
           <a:p>
-            <a:pPr indent="0" marL="0">
+            <a:pPr marL="0" indent="0">
               <a:buNone/>
             </a:pPr>
             <a:r>
@@ -8817,7 +8541,7 @@
           <a:bodyPr wrap="square" rtlCol="0" anchor="ctr"/>
           <a:lstStyle/>
           <a:p>
-            <a:pPr indent="0" marL="0">
+            <a:pPr marL="0" indent="0">
               <a:buNone/>
             </a:pPr>
             <a:r>
@@ -8881,7 +8605,7 @@
           <a:bodyPr wrap="square" rtlCol="0" anchor="ctr"/>
           <a:lstStyle/>
           <a:p>
-            <a:pPr indent="0" marL="0">
+            <a:pPr marL="0" indent="0">
               <a:buNone/>
             </a:pPr>
             <a:r>
@@ -8920,7 +8644,7 @@
           <a:bodyPr wrap="square" rtlCol="0" anchor="ctr"/>
           <a:lstStyle/>
           <a:p>
-            <a:pPr indent="0" marL="0">
+            <a:pPr marL="0" indent="0">
               <a:buNone/>
             </a:pPr>
             <a:r>
@@ -8962,7 +8686,7 @@
             <a:prstDash val="solid"/>
           </a:ln>
           <a:effectLst>
-            <a:outerShdw sx="100000" sy="100000" kx="0" ky="0" algn="bl" rotWithShape="0" blurRad="50800" dist="12700" dir="8100000">
+            <a:outerShdw blurRad="50800" dist="12700" dir="8100000" algn="bl" rotWithShape="0">
               <a:srgbClr val="000000">
                 <a:alpha val="7000"/>
               </a:srgbClr>
@@ -8991,7 +8715,7 @@
           <a:bodyPr wrap="square" rtlCol="0" anchor="ctr"/>
           <a:lstStyle/>
           <a:p>
-            <a:pPr indent="0" marL="0">
+            <a:pPr marL="0" indent="0">
               <a:buNone/>
             </a:pPr>
             <a:r>
@@ -9030,7 +8754,7 @@
           <a:bodyPr wrap="square" rtlCol="0" anchor="ctr"/>
           <a:lstStyle/>
           <a:p>
-            <a:pPr indent="0" marL="0">
+            <a:pPr marL="0" indent="0">
               <a:buNone/>
             </a:pPr>
             <a:r>
@@ -9094,7 +8818,7 @@
           <a:bodyPr wrap="square" rtlCol="0" anchor="ctr"/>
           <a:lstStyle/>
           <a:p>
-            <a:pPr indent="0" marL="0">
+            <a:pPr marL="0" indent="0">
               <a:buNone/>
             </a:pPr>
             <a:r>
@@ -9133,7 +8857,7 @@
           <a:bodyPr wrap="square" rtlCol="0" anchor="ctr"/>
           <a:lstStyle/>
           <a:p>
-            <a:pPr indent="0" marL="0">
+            <a:pPr marL="0" indent="0">
               <a:buNone/>
             </a:pPr>
             <a:r>
@@ -9175,7 +8899,7 @@
             <a:prstDash val="solid"/>
           </a:ln>
           <a:effectLst>
-            <a:outerShdw sx="100000" sy="100000" kx="0" ky="0" algn="bl" rotWithShape="0" blurRad="50800" dist="12700" dir="8100000">
+            <a:outerShdw blurRad="50800" dist="12700" dir="8100000" algn="bl" rotWithShape="0">
               <a:srgbClr val="000000">
                 <a:alpha val="7000"/>
               </a:srgbClr>
@@ -9204,7 +8928,7 @@
           <a:bodyPr wrap="square" rtlCol="0" anchor="ctr"/>
           <a:lstStyle/>
           <a:p>
-            <a:pPr indent="0" marL="0">
+            <a:pPr marL="0" indent="0">
               <a:buNone/>
             </a:pPr>
             <a:r>
@@ -9243,7 +8967,7 @@
           <a:bodyPr wrap="square" rtlCol="0" anchor="ctr"/>
           <a:lstStyle/>
           <a:p>
-            <a:pPr indent="0" marL="0">
+            <a:pPr marL="0" indent="0">
               <a:buNone/>
             </a:pPr>
             <a:r>
@@ -9307,7 +9031,7 @@
           <a:bodyPr wrap="square" rtlCol="0" anchor="ctr"/>
           <a:lstStyle/>
           <a:p>
-            <a:pPr indent="0" marL="0">
+            <a:pPr marL="0" indent="0">
               <a:buNone/>
             </a:pPr>
             <a:r>
@@ -9346,7 +9070,7 @@
           <a:bodyPr wrap="square" rtlCol="0" anchor="ctr"/>
           <a:lstStyle/>
           <a:p>
-            <a:pPr indent="0" marL="0">
+            <a:pPr marL="0" indent="0">
               <a:buNone/>
             </a:pPr>
             <a:r>
@@ -9410,7 +9134,7 @@
           <a:bodyPr wrap="square" rtlCol="0" anchor="ctr"/>
           <a:lstStyle/>
           <a:p>
-            <a:pPr algn="ctr" indent="0" marL="0">
+            <a:pPr marL="0" indent="0" algn="ctr">
               <a:buNone/>
             </a:pPr>
             <a:r>
@@ -9449,7 +9173,7 @@
           <a:bodyPr wrap="square" rtlCol="0" anchor="ctr"/>
           <a:lstStyle/>
           <a:p>
-            <a:pPr algn="l" indent="0" marL="0">
+            <a:pPr marL="0" indent="0" algn="l">
               <a:buNone/>
             </a:pPr>
             <a:r>
@@ -9488,7 +9212,7 @@
           <a:bodyPr wrap="square" rtlCol="0" anchor="ctr"/>
           <a:lstStyle/>
           <a:p>
-            <a:pPr algn="r" indent="0" marL="0">
+            <a:pPr marL="0" indent="0" algn="r">
               <a:buNone/>
             </a:pPr>
             <a:r>
@@ -9522,6 +9246,7 @@
         <a:solidFill>
           <a:srgbClr val="FFFFFF"/>
         </a:solidFill>
+        <a:effectLst/>
       </p:bgPr>
     </p:bg>
     <p:spTree>
@@ -9559,7 +9284,7 @@
           <a:bodyPr wrap="square" rtlCol="0" anchor="ctr"/>
           <a:lstStyle/>
           <a:p>
-            <a:pPr algn="l" indent="0" marL="0">
+            <a:pPr marL="0" indent="0" algn="l">
               <a:buNone/>
             </a:pPr>
             <a:r>
@@ -9626,7 +9351,7 @@
             <a:prstDash val="solid"/>
           </a:ln>
           <a:effectLst>
-            <a:outerShdw sx="100000" sy="100000" kx="0" ky="0" algn="bl" rotWithShape="0" blurRad="50800" dist="12700" dir="8100000">
+            <a:outerShdw blurRad="50800" dist="12700" dir="8100000" algn="bl" rotWithShape="0">
               <a:srgbClr val="000000">
                 <a:alpha val="7000"/>
               </a:srgbClr>
@@ -9680,7 +9405,7 @@
           <a:bodyPr wrap="square" rtlCol="0" anchor="ctr"/>
           <a:lstStyle/>
           <a:p>
-            <a:pPr algn="ctr" indent="0" marL="0">
+            <a:pPr marL="0" indent="0" algn="ctr">
               <a:buNone/>
             </a:pPr>
             <a:r>
@@ -9744,7 +9469,7 @@
           <a:bodyPr wrap="square" rtlCol="0" anchor="ctr"/>
           <a:lstStyle/>
           <a:p>
-            <a:pPr algn="ctr" indent="0" marL="0">
+            <a:pPr marL="0" indent="0" algn="ctr">
               <a:buNone/>
             </a:pPr>
             <a:r>
@@ -9783,7 +9508,7 @@
           <a:bodyPr wrap="square" rtlCol="0" anchor="ctr"/>
           <a:lstStyle/>
           <a:p>
-            <a:pPr indent="0" marL="0">
+            <a:pPr marL="0" indent="0">
               <a:buNone/>
             </a:pPr>
             <a:r>
@@ -9822,7 +9547,7 @@
           <a:bodyPr wrap="square" rtlCol="0" anchor="ctr"/>
           <a:lstStyle/>
           <a:p>
-            <a:pPr indent="0" marL="0">
+            <a:pPr marL="0" indent="0">
               <a:buNone/>
             </a:pPr>
             <a:r>
@@ -9864,7 +9589,7 @@
             <a:prstDash val="solid"/>
           </a:ln>
           <a:effectLst>
-            <a:outerShdw sx="100000" sy="100000" kx="0" ky="0" algn="bl" rotWithShape="0" blurRad="50800" dist="12700" dir="8100000">
+            <a:outerShdw blurRad="50800" dist="12700" dir="8100000" algn="bl" rotWithShape="0">
               <a:srgbClr val="000000">
                 <a:alpha val="7000"/>
               </a:srgbClr>
@@ -9918,7 +9643,7 @@
           <a:bodyPr wrap="square" rtlCol="0" anchor="ctr"/>
           <a:lstStyle/>
           <a:p>
-            <a:pPr algn="ctr" indent="0" marL="0">
+            <a:pPr marL="0" indent="0" algn="ctr">
               <a:buNone/>
             </a:pPr>
             <a:r>
@@ -9982,7 +9707,7 @@
           <a:bodyPr wrap="square" rtlCol="0" anchor="ctr"/>
           <a:lstStyle/>
           <a:p>
-            <a:pPr algn="ctr" indent="0" marL="0">
+            <a:pPr marL="0" indent="0" algn="ctr">
               <a:buNone/>
             </a:pPr>
             <a:r>
@@ -10021,7 +9746,7 @@
           <a:bodyPr wrap="square" rtlCol="0" anchor="ctr"/>
           <a:lstStyle/>
           <a:p>
-            <a:pPr indent="0" marL="0">
+            <a:pPr marL="0" indent="0">
               <a:buNone/>
             </a:pPr>
             <a:r>
@@ -10060,7 +9785,7 @@
           <a:bodyPr wrap="square" rtlCol="0" anchor="ctr"/>
           <a:lstStyle/>
           <a:p>
-            <a:pPr indent="0" marL="0">
+            <a:pPr marL="0" indent="0">
               <a:buNone/>
             </a:pPr>
             <a:r>
@@ -10102,7 +9827,7 @@
             <a:prstDash val="solid"/>
           </a:ln>
           <a:effectLst>
-            <a:outerShdw sx="100000" sy="100000" kx="0" ky="0" algn="bl" rotWithShape="0" blurRad="50800" dist="12700" dir="8100000">
+            <a:outerShdw blurRad="50800" dist="12700" dir="8100000" algn="bl" rotWithShape="0">
               <a:srgbClr val="000000">
                 <a:alpha val="7000"/>
               </a:srgbClr>
@@ -10156,7 +9881,7 @@
           <a:bodyPr wrap="square" rtlCol="0" anchor="ctr"/>
           <a:lstStyle/>
           <a:p>
-            <a:pPr algn="ctr" indent="0" marL="0">
+            <a:pPr marL="0" indent="0" algn="ctr">
               <a:buNone/>
             </a:pPr>
             <a:r>
@@ -10220,7 +9945,7 @@
           <a:bodyPr wrap="square" rtlCol="0" anchor="ctr"/>
           <a:lstStyle/>
           <a:p>
-            <a:pPr algn="ctr" indent="0" marL="0">
+            <a:pPr marL="0" indent="0" algn="ctr">
               <a:buNone/>
             </a:pPr>
             <a:r>
@@ -10259,7 +9984,7 @@
           <a:bodyPr wrap="square" rtlCol="0" anchor="ctr"/>
           <a:lstStyle/>
           <a:p>
-            <a:pPr indent="0" marL="0">
+            <a:pPr marL="0" indent="0">
               <a:buNone/>
             </a:pPr>
             <a:r>
@@ -10298,7 +10023,7 @@
           <a:bodyPr wrap="square" rtlCol="0" anchor="ctr"/>
           <a:lstStyle/>
           <a:p>
-            <a:pPr indent="0" marL="0">
+            <a:pPr marL="0" indent="0">
               <a:buNone/>
             </a:pPr>
             <a:r>
@@ -10340,7 +10065,7 @@
             <a:prstDash val="solid"/>
           </a:ln>
           <a:effectLst>
-            <a:outerShdw sx="100000" sy="100000" kx="0" ky="0" algn="bl" rotWithShape="0" blurRad="50800" dist="12700" dir="8100000">
+            <a:outerShdw blurRad="50800" dist="12700" dir="8100000" algn="bl" rotWithShape="0">
               <a:srgbClr val="000000">
                 <a:alpha val="7000"/>
               </a:srgbClr>
@@ -10394,7 +10119,7 @@
           <a:bodyPr wrap="square" rtlCol="0" anchor="ctr"/>
           <a:lstStyle/>
           <a:p>
-            <a:pPr algn="ctr" indent="0" marL="0">
+            <a:pPr marL="0" indent="0" algn="ctr">
               <a:buNone/>
             </a:pPr>
             <a:r>
@@ -10458,7 +10183,7 @@
           <a:bodyPr wrap="square" rtlCol="0" anchor="ctr"/>
           <a:lstStyle/>
           <a:p>
-            <a:pPr algn="ctr" indent="0" marL="0">
+            <a:pPr marL="0" indent="0" algn="ctr">
               <a:buNone/>
             </a:pPr>
             <a:r>
@@ -10497,7 +10222,7 @@
           <a:bodyPr wrap="square" rtlCol="0" anchor="ctr"/>
           <a:lstStyle/>
           <a:p>
-            <a:pPr indent="0" marL="0">
+            <a:pPr marL="0" indent="0">
               <a:buNone/>
             </a:pPr>
             <a:r>
@@ -10536,7 +10261,7 @@
           <a:bodyPr wrap="square" rtlCol="0" anchor="ctr"/>
           <a:lstStyle/>
           <a:p>
-            <a:pPr indent="0" marL="0">
+            <a:pPr marL="0" indent="0">
               <a:buNone/>
             </a:pPr>
             <a:r>
@@ -10578,7 +10303,7 @@
             <a:prstDash val="solid"/>
           </a:ln>
           <a:effectLst>
-            <a:outerShdw sx="100000" sy="100000" kx="0" ky="0" algn="bl" rotWithShape="0" blurRad="50800" dist="12700" dir="8100000">
+            <a:outerShdw blurRad="50800" dist="12700" dir="8100000" algn="bl" rotWithShape="0">
               <a:srgbClr val="000000">
                 <a:alpha val="7000"/>
               </a:srgbClr>
@@ -10632,7 +10357,7 @@
           <a:bodyPr wrap="square" rtlCol="0" anchor="ctr"/>
           <a:lstStyle/>
           <a:p>
-            <a:pPr algn="ctr" indent="0" marL="0">
+            <a:pPr marL="0" indent="0" algn="ctr">
               <a:buNone/>
             </a:pPr>
             <a:r>
@@ -10696,7 +10421,7 @@
           <a:bodyPr wrap="square" rtlCol="0" anchor="ctr"/>
           <a:lstStyle/>
           <a:p>
-            <a:pPr algn="ctr" indent="0" marL="0">
+            <a:pPr marL="0" indent="0" algn="ctr">
               <a:buNone/>
             </a:pPr>
             <a:r>
@@ -10735,7 +10460,7 @@
           <a:bodyPr wrap="square" rtlCol="0" anchor="ctr"/>
           <a:lstStyle/>
           <a:p>
-            <a:pPr indent="0" marL="0">
+            <a:pPr marL="0" indent="0">
               <a:buNone/>
             </a:pPr>
             <a:r>
@@ -10774,7 +10499,7 @@
           <a:bodyPr wrap="square" rtlCol="0" anchor="ctr"/>
           <a:lstStyle/>
           <a:p>
-            <a:pPr indent="0" marL="0">
+            <a:pPr marL="0" indent="0">
               <a:buNone/>
             </a:pPr>
             <a:r>
@@ -10816,7 +10541,7 @@
             <a:prstDash val="solid"/>
           </a:ln>
           <a:effectLst>
-            <a:outerShdw sx="100000" sy="100000" kx="0" ky="0" algn="bl" rotWithShape="0" blurRad="50800" dist="12700" dir="8100000">
+            <a:outerShdw blurRad="50800" dist="12700" dir="8100000" algn="bl" rotWithShape="0">
               <a:srgbClr val="000000">
                 <a:alpha val="7000"/>
               </a:srgbClr>
@@ -10870,7 +10595,7 @@
           <a:bodyPr wrap="square" rtlCol="0" anchor="ctr"/>
           <a:lstStyle/>
           <a:p>
-            <a:pPr algn="ctr" indent="0" marL="0">
+            <a:pPr marL="0" indent="0" algn="ctr">
               <a:buNone/>
             </a:pPr>
             <a:r>
@@ -10934,7 +10659,7 @@
           <a:bodyPr wrap="square" rtlCol="0" anchor="ctr"/>
           <a:lstStyle/>
           <a:p>
-            <a:pPr algn="ctr" indent="0" marL="0">
+            <a:pPr marL="0" indent="0" algn="ctr">
               <a:buNone/>
             </a:pPr>
             <a:r>
@@ -10973,7 +10698,7 @@
           <a:bodyPr wrap="square" rtlCol="0" anchor="ctr"/>
           <a:lstStyle/>
           <a:p>
-            <a:pPr indent="0" marL="0">
+            <a:pPr marL="0" indent="0">
               <a:buNone/>
             </a:pPr>
             <a:r>
@@ -11012,7 +10737,7 @@
           <a:bodyPr wrap="square" rtlCol="0" anchor="ctr"/>
           <a:lstStyle/>
           <a:p>
-            <a:pPr indent="0" marL="0">
+            <a:pPr marL="0" indent="0">
               <a:buNone/>
             </a:pPr>
             <a:r>
@@ -11051,7 +10776,7 @@
           <a:bodyPr wrap="square" rtlCol="0" anchor="ctr"/>
           <a:lstStyle/>
           <a:p>
-            <a:pPr algn="l" indent="0" marL="0">
+            <a:pPr marL="0" indent="0" algn="l">
               <a:buNone/>
             </a:pPr>
             <a:r>
@@ -11090,7 +10815,7 @@
           <a:bodyPr wrap="square" rtlCol="0" anchor="ctr"/>
           <a:lstStyle/>
           <a:p>
-            <a:pPr algn="r" indent="0" marL="0">
+            <a:pPr marL="0" indent="0" algn="r">
               <a:buNone/>
             </a:pPr>
             <a:r>
@@ -11124,6 +10849,7 @@
         <a:solidFill>
           <a:srgbClr val="FFFFFF"/>
         </a:solidFill>
+        <a:effectLst/>
       </p:bgPr>
     </p:bg>
     <p:spTree>
@@ -11161,7 +10887,7 @@
           <a:bodyPr wrap="square" rtlCol="0" anchor="ctr"/>
           <a:lstStyle/>
           <a:p>
-            <a:pPr algn="l" indent="0" marL="0">
+            <a:pPr marL="0" indent="0" algn="l">
               <a:buNone/>
             </a:pPr>
             <a:r>
@@ -11228,7 +10954,7 @@
             <a:prstDash val="solid"/>
           </a:ln>
           <a:effectLst>
-            <a:outerShdw sx="100000" sy="100000" kx="0" ky="0" algn="bl" rotWithShape="0" blurRad="50800" dist="12700" dir="8100000">
+            <a:outerShdw blurRad="50800" dist="12700" dir="8100000" algn="bl" rotWithShape="0">
               <a:srgbClr val="000000">
                 <a:alpha val="7000"/>
               </a:srgbClr>
@@ -11307,7 +11033,7 @@
           <a:bodyPr wrap="square" rtlCol="0" anchor="ctr"/>
           <a:lstStyle/>
           <a:p>
-            <a:pPr algn="ctr" indent="0" marL="0">
+            <a:pPr marL="0" indent="0" algn="ctr">
               <a:buNone/>
             </a:pPr>
             <a:r>
@@ -11346,7 +11072,7 @@
           <a:bodyPr wrap="square" rtlCol="0" anchor="ctr"/>
           <a:lstStyle/>
           <a:p>
-            <a:pPr indent="0" marL="0">
+            <a:pPr marL="0" indent="0">
               <a:buNone/>
             </a:pPr>
             <a:r>
@@ -11385,7 +11111,7 @@
           <a:bodyPr wrap="square" rtlCol="0" anchor="ctr"/>
           <a:lstStyle/>
           <a:p>
-            <a:pPr indent="0" marL="0">
+            <a:pPr marL="0" indent="0">
               <a:buNone/>
             </a:pPr>
             <a:r>
@@ -11427,7 +11153,7 @@
             <a:prstDash val="solid"/>
           </a:ln>
           <a:effectLst>
-            <a:outerShdw sx="100000" sy="100000" kx="0" ky="0" algn="bl" rotWithShape="0" blurRad="50800" dist="12700" dir="8100000">
+            <a:outerShdw blurRad="50800" dist="12700" dir="8100000" algn="bl" rotWithShape="0">
               <a:srgbClr val="000000">
                 <a:alpha val="7000"/>
               </a:srgbClr>
@@ -11506,7 +11232,7 @@
           <a:bodyPr wrap="square" rtlCol="0" anchor="ctr"/>
           <a:lstStyle/>
           <a:p>
-            <a:pPr algn="ctr" indent="0" marL="0">
+            <a:pPr marL="0" indent="0" algn="ctr">
               <a:buNone/>
             </a:pPr>
             <a:r>
@@ -11545,7 +11271,7 @@
           <a:bodyPr wrap="square" rtlCol="0" anchor="ctr"/>
           <a:lstStyle/>
           <a:p>
-            <a:pPr indent="0" marL="0">
+            <a:pPr marL="0" indent="0">
               <a:buNone/>
             </a:pPr>
             <a:r>
@@ -11584,7 +11310,7 @@
           <a:bodyPr wrap="square" rtlCol="0" anchor="ctr"/>
           <a:lstStyle/>
           <a:p>
-            <a:pPr indent="0" marL="0">
+            <a:pPr marL="0" indent="0">
               <a:buNone/>
             </a:pPr>
             <a:r>
@@ -11626,7 +11352,7 @@
             <a:prstDash val="solid"/>
           </a:ln>
           <a:effectLst>
-            <a:outerShdw sx="100000" sy="100000" kx="0" ky="0" algn="bl" rotWithShape="0" blurRad="50800" dist="12700" dir="8100000">
+            <a:outerShdw blurRad="50800" dist="12700" dir="8100000" algn="bl" rotWithShape="0">
               <a:srgbClr val="000000">
                 <a:alpha val="7000"/>
               </a:srgbClr>
@@ -11705,7 +11431,7 @@
           <a:bodyPr wrap="square" rtlCol="0" anchor="ctr"/>
           <a:lstStyle/>
           <a:p>
-            <a:pPr algn="ctr" indent="0" marL="0">
+            <a:pPr marL="0" indent="0" algn="ctr">
               <a:buNone/>
             </a:pPr>
             <a:r>
@@ -11744,7 +11470,7 @@
           <a:bodyPr wrap="square" rtlCol="0" anchor="ctr"/>
           <a:lstStyle/>
           <a:p>
-            <a:pPr indent="0" marL="0">
+            <a:pPr marL="0" indent="0">
               <a:buNone/>
             </a:pPr>
             <a:r>
@@ -11783,7 +11509,7 @@
           <a:bodyPr wrap="square" rtlCol="0" anchor="ctr"/>
           <a:lstStyle/>
           <a:p>
-            <a:pPr indent="0" marL="0">
+            <a:pPr marL="0" indent="0">
               <a:buNone/>
             </a:pPr>
             <a:r>
@@ -11825,7 +11551,7 @@
             <a:prstDash val="solid"/>
           </a:ln>
           <a:effectLst>
-            <a:outerShdw sx="100000" sy="100000" kx="0" ky="0" algn="bl" rotWithShape="0" blurRad="50800" dist="12700" dir="8100000">
+            <a:outerShdw blurRad="50800" dist="12700" dir="8100000" algn="bl" rotWithShape="0">
               <a:srgbClr val="000000">
                 <a:alpha val="7000"/>
               </a:srgbClr>
@@ -11904,7 +11630,7 @@
           <a:bodyPr wrap="square" rtlCol="0" anchor="ctr"/>
           <a:lstStyle/>
           <a:p>
-            <a:pPr algn="ctr" indent="0" marL="0">
+            <a:pPr marL="0" indent="0" algn="ctr">
               <a:buNone/>
             </a:pPr>
             <a:r>
@@ -11943,7 +11669,7 @@
           <a:bodyPr wrap="square" rtlCol="0" anchor="ctr"/>
           <a:lstStyle/>
           <a:p>
-            <a:pPr indent="0" marL="0">
+            <a:pPr marL="0" indent="0">
               <a:buNone/>
             </a:pPr>
             <a:r>
@@ -11982,7 +11708,7 @@
           <a:bodyPr wrap="square" rtlCol="0" anchor="ctr"/>
           <a:lstStyle/>
           <a:p>
-            <a:pPr indent="0" marL="0">
+            <a:pPr marL="0" indent="0">
               <a:buNone/>
             </a:pPr>
             <a:r>
@@ -12024,7 +11750,7 @@
             <a:prstDash val="solid"/>
           </a:ln>
           <a:effectLst>
-            <a:outerShdw sx="100000" sy="100000" kx="0" ky="0" algn="bl" rotWithShape="0" blurRad="50800" dist="12700" dir="8100000">
+            <a:outerShdw blurRad="50800" dist="12700" dir="8100000" algn="bl" rotWithShape="0">
               <a:srgbClr val="000000">
                 <a:alpha val="7000"/>
               </a:srgbClr>
@@ -12103,7 +11829,7 @@
           <a:bodyPr wrap="square" rtlCol="0" anchor="ctr"/>
           <a:lstStyle/>
           <a:p>
-            <a:pPr algn="ctr" indent="0" marL="0">
+            <a:pPr marL="0" indent="0" algn="ctr">
               <a:buNone/>
             </a:pPr>
             <a:r>
@@ -12142,7 +11868,7 @@
           <a:bodyPr wrap="square" rtlCol="0" anchor="ctr"/>
           <a:lstStyle/>
           <a:p>
-            <a:pPr indent="0" marL="0">
+            <a:pPr marL="0" indent="0">
               <a:buNone/>
             </a:pPr>
             <a:r>
@@ -12181,7 +11907,7 @@
           <a:bodyPr wrap="square" rtlCol="0" anchor="ctr"/>
           <a:lstStyle/>
           <a:p>
-            <a:pPr indent="0" marL="0">
+            <a:pPr marL="0" indent="0">
               <a:buNone/>
             </a:pPr>
             <a:r>
@@ -12223,7 +11949,7 @@
             <a:prstDash val="solid"/>
           </a:ln>
           <a:effectLst>
-            <a:outerShdw sx="100000" sy="100000" kx="0" ky="0" algn="bl" rotWithShape="0" blurRad="50800" dist="12700" dir="8100000">
+            <a:outerShdw blurRad="50800" dist="12700" dir="8100000" algn="bl" rotWithShape="0">
               <a:srgbClr val="000000">
                 <a:alpha val="7000"/>
               </a:srgbClr>
@@ -12302,7 +12028,7 @@
           <a:bodyPr wrap="square" rtlCol="0" anchor="ctr"/>
           <a:lstStyle/>
           <a:p>
-            <a:pPr algn="ctr" indent="0" marL="0">
+            <a:pPr marL="0" indent="0" algn="ctr">
               <a:buNone/>
             </a:pPr>
             <a:r>
@@ -12341,7 +12067,7 @@
           <a:bodyPr wrap="square" rtlCol="0" anchor="ctr"/>
           <a:lstStyle/>
           <a:p>
-            <a:pPr indent="0" marL="0">
+            <a:pPr marL="0" indent="0">
               <a:buNone/>
             </a:pPr>
             <a:r>
@@ -12380,7 +12106,7 @@
           <a:bodyPr wrap="square" rtlCol="0" anchor="ctr"/>
           <a:lstStyle/>
           <a:p>
-            <a:pPr indent="0" marL="0">
+            <a:pPr marL="0" indent="0">
               <a:buNone/>
             </a:pPr>
             <a:r>
@@ -12419,7 +12145,7 @@
           <a:bodyPr wrap="square" rtlCol="0" anchor="ctr"/>
           <a:lstStyle/>
           <a:p>
-            <a:pPr algn="l" indent="0" marL="0">
+            <a:pPr marL="0" indent="0" algn="l">
               <a:buNone/>
             </a:pPr>
             <a:r>
@@ -12458,7 +12184,7 @@
           <a:bodyPr wrap="square" rtlCol="0" anchor="ctr"/>
           <a:lstStyle/>
           <a:p>
-            <a:pPr algn="r" indent="0" marL="0">
+            <a:pPr marL="0" indent="0" algn="r">
               <a:buNone/>
             </a:pPr>
             <a:r>
@@ -12492,6 +12218,7 @@
         <a:solidFill>
           <a:srgbClr val="064E3B"/>
         </a:solidFill>
+        <a:effectLst/>
       </p:bgPr>
     </p:bg>
     <p:spTree>
@@ -12529,7 +12256,7 @@
           <a:bodyPr wrap="square" rtlCol="0" anchor="ctr"/>
           <a:lstStyle/>
           <a:p>
-            <a:pPr algn="ctr" indent="0" marL="0">
+            <a:pPr marL="0" indent="0" algn="ctr">
               <a:buNone/>
             </a:pPr>
             <a:r>
@@ -12618,7 +12345,7 @@
           <a:bodyPr wrap="square" rtlCol="0" anchor="ctr"/>
           <a:lstStyle/>
           <a:p>
-            <a:pPr indent="0" marL="0">
+            <a:pPr marL="0" indent="0">
               <a:buNone/>
             </a:pPr>
             <a:r>
@@ -12682,7 +12409,7 @@
           <a:bodyPr wrap="square" rtlCol="0" anchor="ctr"/>
           <a:lstStyle/>
           <a:p>
-            <a:pPr indent="0" marL="0">
+            <a:pPr marL="0" indent="0">
               <a:buNone/>
             </a:pPr>
             <a:r>
@@ -12746,7 +12473,7 @@
           <a:bodyPr wrap="square" rtlCol="0" anchor="ctr"/>
           <a:lstStyle/>
           <a:p>
-            <a:pPr indent="0" marL="0">
+            <a:pPr marL="0" indent="0">
               <a:buNone/>
             </a:pPr>
             <a:r>
@@ -12810,7 +12537,7 @@
           <a:bodyPr wrap="square" rtlCol="0" anchor="ctr"/>
           <a:lstStyle/>
           <a:p>
-            <a:pPr indent="0" marL="0">
+            <a:pPr marL="0" indent="0">
               <a:buNone/>
             </a:pPr>
             <a:r>
@@ -12874,7 +12601,7 @@
           <a:bodyPr wrap="square" rtlCol="0" anchor="ctr"/>
           <a:lstStyle/>
           <a:p>
-            <a:pPr indent="0" marL="0">
+            <a:pPr marL="0" indent="0">
               <a:buNone/>
             </a:pPr>
             <a:r>
@@ -12938,7 +12665,7 @@
           <a:bodyPr wrap="square" rtlCol="0" anchor="ctr"/>
           <a:lstStyle/>
           <a:p>
-            <a:pPr algn="ctr" indent="0" marL="0">
+            <a:pPr marL="0" indent="0" algn="ctr">
               <a:buNone/>
             </a:pPr>
             <a:r>
@@ -12977,7 +12704,7 @@
           <a:bodyPr wrap="square" rtlCol="0" anchor="ctr"/>
           <a:lstStyle/>
           <a:p>
-            <a:pPr algn="ctr" indent="0" marL="0">
+            <a:pPr marL="0" indent="0" algn="ctr">
               <a:buNone/>
             </a:pPr>
             <a:r>
@@ -13011,6 +12738,7 @@
         <a:solidFill>
           <a:srgbClr val="FFFFFF"/>
         </a:solidFill>
+        <a:effectLst/>
       </p:bgPr>
     </p:bg>
     <p:spTree>
@@ -13048,7 +12776,7 @@
           <a:bodyPr wrap="square" rtlCol="0" anchor="ctr"/>
           <a:lstStyle/>
           <a:p>
-            <a:pPr algn="l" indent="0" marL="0">
+            <a:pPr marL="0" indent="0" algn="l">
               <a:buNone/>
             </a:pPr>
             <a:r>
@@ -13115,7 +12843,7 @@
             <a:prstDash val="solid"/>
           </a:ln>
           <a:effectLst>
-            <a:outerShdw sx="100000" sy="100000" kx="0" ky="0" algn="bl" rotWithShape="0" blurRad="63500" dist="25400" dir="8100000">
+            <a:outerShdw blurRad="63500" dist="25400" dir="8100000" algn="bl" rotWithShape="0">
               <a:srgbClr val="000000">
                 <a:alpha val="8000"/>
               </a:srgbClr>
@@ -13169,7 +12897,7 @@
           <a:bodyPr wrap="square" rtlCol="0" anchor="ctr"/>
           <a:lstStyle/>
           <a:p>
-            <a:pPr algn="ctr" indent="0" marL="0">
+            <a:pPr marL="0" indent="0" algn="ctr">
               <a:buNone/>
             </a:pPr>
             <a:r>
@@ -13208,7 +12936,7 @@
           <a:bodyPr wrap="square" rtlCol="0" anchor="ctr"/>
           <a:lstStyle/>
           <a:p>
-            <a:pPr algn="ctr" indent="0" marL="0">
+            <a:pPr marL="0" indent="0" algn="ctr">
               <a:buNone/>
             </a:pPr>
             <a:r>
@@ -13247,7 +12975,7 @@
           <a:bodyPr wrap="square" rtlCol="0" anchor="ctr"/>
           <a:lstStyle/>
           <a:p>
-            <a:pPr algn="ctr" indent="0" marL="0">
+            <a:pPr marL="0" indent="0" algn="ctr">
               <a:buNone/>
             </a:pPr>
             <a:r>
@@ -13289,7 +13017,7 @@
             <a:prstDash val="solid"/>
           </a:ln>
           <a:effectLst>
-            <a:outerShdw sx="100000" sy="100000" kx="0" ky="0" algn="bl" rotWithShape="0" blurRad="63500" dist="25400" dir="8100000">
+            <a:outerShdw blurRad="63500" dist="25400" dir="8100000" algn="bl" rotWithShape="0">
               <a:srgbClr val="000000">
                 <a:alpha val="8000"/>
               </a:srgbClr>
@@ -13343,7 +13071,7 @@
           <a:bodyPr wrap="square" rtlCol="0" anchor="ctr"/>
           <a:lstStyle/>
           <a:p>
-            <a:pPr algn="ctr" indent="0" marL="0">
+            <a:pPr marL="0" indent="0" algn="ctr">
               <a:buNone/>
             </a:pPr>
             <a:r>
@@ -13382,7 +13110,7 @@
           <a:bodyPr wrap="square" rtlCol="0" anchor="ctr"/>
           <a:lstStyle/>
           <a:p>
-            <a:pPr algn="ctr" indent="0" marL="0">
+            <a:pPr marL="0" indent="0" algn="ctr">
               <a:buNone/>
             </a:pPr>
             <a:r>
@@ -13421,7 +13149,7 @@
           <a:bodyPr wrap="square" rtlCol="0" anchor="ctr"/>
           <a:lstStyle/>
           <a:p>
-            <a:pPr algn="ctr" indent="0" marL="0">
+            <a:pPr marL="0" indent="0" algn="ctr">
               <a:buNone/>
             </a:pPr>
             <a:r>
@@ -13463,7 +13191,7 @@
             <a:prstDash val="solid"/>
           </a:ln>
           <a:effectLst>
-            <a:outerShdw sx="100000" sy="100000" kx="0" ky="0" algn="bl" rotWithShape="0" blurRad="63500" dist="25400" dir="8100000">
+            <a:outerShdw blurRad="63500" dist="25400" dir="8100000" algn="bl" rotWithShape="0">
               <a:srgbClr val="000000">
                 <a:alpha val="8000"/>
               </a:srgbClr>
@@ -13517,7 +13245,7 @@
           <a:bodyPr wrap="square" rtlCol="0" anchor="ctr"/>
           <a:lstStyle/>
           <a:p>
-            <a:pPr algn="ctr" indent="0" marL="0">
+            <a:pPr marL="0" indent="0" algn="ctr">
               <a:buNone/>
             </a:pPr>
             <a:r>
@@ -13556,7 +13284,7 @@
           <a:bodyPr wrap="square" rtlCol="0" anchor="ctr"/>
           <a:lstStyle/>
           <a:p>
-            <a:pPr algn="ctr" indent="0" marL="0">
+            <a:pPr marL="0" indent="0" algn="ctr">
               <a:buNone/>
             </a:pPr>
             <a:r>
@@ -13595,7 +13323,7 @@
           <a:bodyPr wrap="square" rtlCol="0" anchor="ctr"/>
           <a:lstStyle/>
           <a:p>
-            <a:pPr algn="ctr" indent="0" marL="0">
+            <a:pPr marL="0" indent="0" algn="ctr">
               <a:buNone/>
             </a:pPr>
             <a:r>
@@ -13637,7 +13365,7 @@
             <a:prstDash val="solid"/>
           </a:ln>
           <a:effectLst>
-            <a:outerShdw sx="100000" sy="100000" kx="0" ky="0" algn="bl" rotWithShape="0" blurRad="63500" dist="25400" dir="8100000">
+            <a:outerShdw blurRad="63500" dist="25400" dir="8100000" algn="bl" rotWithShape="0">
               <a:srgbClr val="000000">
                 <a:alpha val="8000"/>
               </a:srgbClr>
@@ -13691,7 +13419,7 @@
           <a:bodyPr wrap="square" rtlCol="0" anchor="ctr"/>
           <a:lstStyle/>
           <a:p>
-            <a:pPr algn="ctr" indent="0" marL="0">
+            <a:pPr marL="0" indent="0" algn="ctr">
               <a:buNone/>
             </a:pPr>
             <a:r>
@@ -13730,7 +13458,7 @@
           <a:bodyPr wrap="square" rtlCol="0" anchor="ctr"/>
           <a:lstStyle/>
           <a:p>
-            <a:pPr algn="ctr" indent="0" marL="0">
+            <a:pPr marL="0" indent="0" algn="ctr">
               <a:buNone/>
             </a:pPr>
             <a:r>
@@ -13769,7 +13497,7 @@
           <a:bodyPr wrap="square" rtlCol="0" anchor="ctr"/>
           <a:lstStyle/>
           <a:p>
-            <a:pPr algn="ctr" indent="0" marL="0">
+            <a:pPr marL="0" indent="0" algn="ctr">
               <a:buNone/>
             </a:pPr>
             <a:r>
@@ -13811,7 +13539,7 @@
             <a:prstDash val="solid"/>
           </a:ln>
           <a:effectLst>
-            <a:outerShdw sx="100000" sy="100000" kx="0" ky="0" algn="bl" rotWithShape="0" blurRad="63500" dist="25400" dir="8100000">
+            <a:outerShdw blurRad="63500" dist="25400" dir="8100000" algn="bl" rotWithShape="0">
               <a:srgbClr val="000000">
                 <a:alpha val="8000"/>
               </a:srgbClr>
@@ -13865,7 +13593,7 @@
           <a:bodyPr wrap="square" rtlCol="0" anchor="ctr"/>
           <a:lstStyle/>
           <a:p>
-            <a:pPr algn="ctr" indent="0" marL="0">
+            <a:pPr marL="0" indent="0" algn="ctr">
               <a:buNone/>
             </a:pPr>
             <a:r>
@@ -13904,7 +13632,7 @@
           <a:bodyPr wrap="square" rtlCol="0" anchor="ctr"/>
           <a:lstStyle/>
           <a:p>
-            <a:pPr algn="ctr" indent="0" marL="0">
+            <a:pPr marL="0" indent="0" algn="ctr">
               <a:buNone/>
             </a:pPr>
             <a:r>
@@ -13943,7 +13671,7 @@
           <a:bodyPr wrap="square" rtlCol="0" anchor="ctr"/>
           <a:lstStyle/>
           <a:p>
-            <a:pPr algn="ctr" indent="0" marL="0">
+            <a:pPr marL="0" indent="0" algn="ctr">
               <a:buNone/>
             </a:pPr>
             <a:r>
@@ -13982,7 +13710,7 @@
           <a:bodyPr wrap="square" rtlCol="0" anchor="ctr"/>
           <a:lstStyle/>
           <a:p>
-            <a:pPr algn="l" indent="0" marL="0">
+            <a:pPr marL="0" indent="0" algn="l">
               <a:buNone/>
             </a:pPr>
             <a:r>
@@ -14021,7 +13749,7 @@
           <a:bodyPr wrap="square" rtlCol="0" anchor="ctr"/>
           <a:lstStyle/>
           <a:p>
-            <a:pPr algn="r" indent="0" marL="0">
+            <a:pPr marL="0" indent="0" algn="r">
               <a:buNone/>
             </a:pPr>
             <a:r>
@@ -14055,6 +13783,7 @@
         <a:solidFill>
           <a:srgbClr val="FFFFFF"/>
         </a:solidFill>
+        <a:effectLst/>
       </p:bgPr>
     </p:bg>
     <p:spTree>
@@ -14092,7 +13821,7 @@
           <a:bodyPr wrap="square" rtlCol="0" anchor="ctr"/>
           <a:lstStyle/>
           <a:p>
-            <a:pPr algn="l" indent="0" marL="0">
+            <a:pPr marL="0" indent="0" algn="l">
               <a:buNone/>
             </a:pPr>
             <a:r>
@@ -14181,7 +13910,7 @@
           <a:bodyPr wrap="square" rtlCol="0" anchor="ctr"/>
           <a:lstStyle/>
           <a:p>
-            <a:pPr algn="ctr" indent="0" marL="0">
+            <a:pPr marL="0" indent="0" algn="ctr">
               <a:buNone/>
             </a:pPr>
             <a:r>
@@ -14270,7 +13999,7 @@
           <a:bodyPr wrap="square" rtlCol="0" anchor="ctr"/>
           <a:lstStyle/>
           <a:p>
-            <a:pPr indent="0" marL="0">
+            <a:pPr marL="0" indent="0">
               <a:buNone/>
             </a:pPr>
             <a:r>
@@ -14334,7 +14063,7 @@
           <a:bodyPr wrap="square" rtlCol="0" anchor="ctr"/>
           <a:lstStyle/>
           <a:p>
-            <a:pPr indent="0" marL="0">
+            <a:pPr marL="0" indent="0">
               <a:buNone/>
             </a:pPr>
             <a:r>
@@ -14398,7 +14127,7 @@
           <a:bodyPr wrap="square" rtlCol="0" anchor="ctr"/>
           <a:lstStyle/>
           <a:p>
-            <a:pPr indent="0" marL="0">
+            <a:pPr marL="0" indent="0">
               <a:buNone/>
             </a:pPr>
             <a:r>
@@ -14462,7 +14191,7 @@
           <a:bodyPr wrap="square" rtlCol="0" anchor="ctr"/>
           <a:lstStyle/>
           <a:p>
-            <a:pPr indent="0" marL="0">
+            <a:pPr marL="0" indent="0">
               <a:buNone/>
             </a:pPr>
             <a:r>
@@ -14526,7 +14255,7 @@
           <a:bodyPr wrap="square" rtlCol="0" anchor="ctr"/>
           <a:lstStyle/>
           <a:p>
-            <a:pPr indent="0" marL="0">
+            <a:pPr marL="0" indent="0">
               <a:buNone/>
             </a:pPr>
             <a:r>
@@ -14588,7 +14317,7 @@
           <a:bodyPr wrap="square" rtlCol="0" anchor="ctr"/>
           <a:lstStyle/>
           <a:p>
-            <a:pPr algn="ctr" indent="0" marL="0">
+            <a:pPr marL="0" indent="0" algn="ctr">
               <a:buNone/>
             </a:pPr>
             <a:r>
@@ -14652,7 +14381,7 @@
           <a:bodyPr wrap="square" rtlCol="0" anchor="ctr"/>
           <a:lstStyle/>
           <a:p>
-            <a:pPr algn="ctr" indent="0" marL="0">
+            <a:pPr marL="0" indent="0" algn="ctr">
               <a:buNone/>
             </a:pPr>
             <a:r>
@@ -14741,7 +14470,7 @@
           <a:bodyPr wrap="square" rtlCol="0" anchor="ctr"/>
           <a:lstStyle/>
           <a:p>
-            <a:pPr indent="0" marL="0">
+            <a:pPr marL="0" indent="0">
               <a:buNone/>
             </a:pPr>
             <a:r>
@@ -14805,7 +14534,7 @@
           <a:bodyPr wrap="square" rtlCol="0" anchor="ctr"/>
           <a:lstStyle/>
           <a:p>
-            <a:pPr indent="0" marL="0">
+            <a:pPr marL="0" indent="0">
               <a:buNone/>
             </a:pPr>
             <a:r>
@@ -14869,7 +14598,7 @@
           <a:bodyPr wrap="square" rtlCol="0" anchor="ctr"/>
           <a:lstStyle/>
           <a:p>
-            <a:pPr indent="0" marL="0">
+            <a:pPr marL="0" indent="0">
               <a:buNone/>
             </a:pPr>
             <a:r>
@@ -14933,7 +14662,7 @@
           <a:bodyPr wrap="square" rtlCol="0" anchor="ctr"/>
           <a:lstStyle/>
           <a:p>
-            <a:pPr indent="0" marL="0">
+            <a:pPr marL="0" indent="0">
               <a:buNone/>
             </a:pPr>
             <a:r>
@@ -14997,7 +14726,7 @@
           <a:bodyPr wrap="square" rtlCol="0" anchor="ctr"/>
           <a:lstStyle/>
           <a:p>
-            <a:pPr indent="0" marL="0">
+            <a:pPr marL="0" indent="0">
               <a:buNone/>
             </a:pPr>
             <a:r>
@@ -15036,7 +14765,7 @@
           <a:bodyPr wrap="square" rtlCol="0" anchor="ctr"/>
           <a:lstStyle/>
           <a:p>
-            <a:pPr algn="l" indent="0" marL="0">
+            <a:pPr marL="0" indent="0" algn="l">
               <a:buNone/>
             </a:pPr>
             <a:r>
@@ -15075,7 +14804,7 @@
           <a:bodyPr wrap="square" rtlCol="0" anchor="ctr"/>
           <a:lstStyle/>
           <a:p>
-            <a:pPr algn="r" indent="0" marL="0">
+            <a:pPr marL="0" indent="0" algn="r">
               <a:buNone/>
             </a:pPr>
             <a:r>
@@ -15109,6 +14838,7 @@
         <a:solidFill>
           <a:srgbClr val="FFFFFF"/>
         </a:solidFill>
+        <a:effectLst/>
       </p:bgPr>
     </p:bg>
     <p:spTree>
@@ -15146,7 +14876,7 @@
           <a:bodyPr wrap="square" rtlCol="0" anchor="ctr"/>
           <a:lstStyle/>
           <a:p>
-            <a:pPr algn="l" indent="0" marL="0">
+            <a:pPr marL="0" indent="0" algn="l">
               <a:buNone/>
             </a:pPr>
             <a:r>
@@ -15235,7 +14965,7 @@
           <a:bodyPr wrap="square" rtlCol="0" anchor="ctr"/>
           <a:lstStyle/>
           <a:p>
-            <a:pPr algn="ctr" indent="0" marL="0">
+            <a:pPr marL="0" indent="0" algn="ctr">
               <a:buNone/>
             </a:pPr>
             <a:r>
@@ -15299,7 +15029,7 @@
           <a:bodyPr wrap="square" rtlCol="0" anchor="ctr"/>
           <a:lstStyle/>
           <a:p>
-            <a:pPr indent="0" marL="0">
+            <a:pPr marL="0" indent="0">
               <a:buNone/>
             </a:pPr>
             <a:r>
@@ -15363,7 +15093,7 @@
           <a:bodyPr wrap="square" rtlCol="0" anchor="ctr"/>
           <a:lstStyle/>
           <a:p>
-            <a:pPr indent="0" marL="0">
+            <a:pPr marL="0" indent="0">
               <a:buNone/>
             </a:pPr>
             <a:r>
@@ -15427,7 +15157,7 @@
           <a:bodyPr wrap="square" rtlCol="0" anchor="ctr"/>
           <a:lstStyle/>
           <a:p>
-            <a:pPr indent="0" marL="0">
+            <a:pPr marL="0" indent="0">
               <a:buNone/>
             </a:pPr>
             <a:r>
@@ -15491,7 +15221,7 @@
           <a:bodyPr wrap="square" rtlCol="0" anchor="ctr"/>
           <a:lstStyle/>
           <a:p>
-            <a:pPr indent="0" marL="0">
+            <a:pPr marL="0" indent="0">
               <a:buNone/>
             </a:pPr>
             <a:r>
@@ -15555,7 +15285,7 @@
           <a:bodyPr wrap="square" rtlCol="0" anchor="ctr"/>
           <a:lstStyle/>
           <a:p>
-            <a:pPr indent="0" marL="0">
+            <a:pPr marL="0" indent="0">
               <a:buNone/>
             </a:pPr>
             <a:r>
@@ -15619,7 +15349,7 @@
           <a:bodyPr wrap="square" rtlCol="0" anchor="ctr"/>
           <a:lstStyle/>
           <a:p>
-            <a:pPr indent="0" marL="0">
+            <a:pPr marL="0" indent="0">
               <a:buNone/>
             </a:pPr>
             <a:r>
@@ -15683,7 +15413,7 @@
           <a:bodyPr wrap="square" rtlCol="0" anchor="ctr"/>
           <a:lstStyle/>
           <a:p>
-            <a:pPr indent="0" marL="0">
+            <a:pPr marL="0" indent="0">
               <a:buNone/>
             </a:pPr>
             <a:r>
@@ -15747,7 +15477,7 @@
           <a:bodyPr wrap="square" rtlCol="0" anchor="ctr"/>
           <a:lstStyle/>
           <a:p>
-            <a:pPr algn="ctr" indent="0" marL="0">
+            <a:pPr marL="0" indent="0" algn="ctr">
               <a:buNone/>
             </a:pPr>
             <a:r>
@@ -15811,7 +15541,7 @@
           <a:bodyPr wrap="square" rtlCol="0" anchor="ctr"/>
           <a:lstStyle/>
           <a:p>
-            <a:pPr indent="0" marL="0">
+            <a:pPr marL="0" indent="0">
               <a:buNone/>
             </a:pPr>
             <a:r>
@@ -15850,7 +15580,7 @@
           <a:bodyPr wrap="square" rtlCol="0" anchor="ctr"/>
           <a:lstStyle/>
           <a:p>
-            <a:pPr indent="0" marL="0">
+            <a:pPr marL="0" indent="0">
               <a:buNone/>
             </a:pPr>
             <a:r>
@@ -15914,7 +15644,7 @@
           <a:bodyPr wrap="square" rtlCol="0" anchor="ctr"/>
           <a:lstStyle/>
           <a:p>
-            <a:pPr indent="0" marL="0">
+            <a:pPr marL="0" indent="0">
               <a:buNone/>
             </a:pPr>
             <a:r>
@@ -15953,7 +15683,7 @@
           <a:bodyPr wrap="square" rtlCol="0" anchor="ctr"/>
           <a:lstStyle/>
           <a:p>
-            <a:pPr indent="0" marL="0">
+            <a:pPr marL="0" indent="0">
               <a:buNone/>
             </a:pPr>
             <a:r>
@@ -16017,7 +15747,7 @@
           <a:bodyPr wrap="square" rtlCol="0" anchor="ctr"/>
           <a:lstStyle/>
           <a:p>
-            <a:pPr indent="0" marL="0">
+            <a:pPr marL="0" indent="0">
               <a:buNone/>
             </a:pPr>
             <a:r>
@@ -16056,7 +15786,7 @@
           <a:bodyPr wrap="square" rtlCol="0" anchor="ctr"/>
           <a:lstStyle/>
           <a:p>
-            <a:pPr indent="0" marL="0">
+            <a:pPr marL="0" indent="0">
               <a:buNone/>
             </a:pPr>
             <a:r>
@@ -16095,7 +15825,7 @@
           <a:bodyPr wrap="square" rtlCol="0" anchor="ctr"/>
           <a:lstStyle/>
           <a:p>
-            <a:pPr algn="l" indent="0" marL="0">
+            <a:pPr marL="0" indent="0" algn="l">
               <a:buNone/>
             </a:pPr>
             <a:r>
@@ -16134,7 +15864,7 @@
           <a:bodyPr wrap="square" rtlCol="0" anchor="ctr"/>
           <a:lstStyle/>
           <a:p>
-            <a:pPr algn="r" indent="0" marL="0">
+            <a:pPr marL="0" indent="0" algn="r">
               <a:buNone/>
             </a:pPr>
             <a:r>
@@ -16168,6 +15898,7 @@
         <a:solidFill>
           <a:srgbClr val="FFFFFF"/>
         </a:solidFill>
+        <a:effectLst/>
       </p:bgPr>
     </p:bg>
     <p:spTree>
@@ -16205,7 +15936,7 @@
           <a:bodyPr wrap="square" rtlCol="0" anchor="ctr"/>
           <a:lstStyle/>
           <a:p>
-            <a:pPr algn="l" indent="0" marL="0">
+            <a:pPr marL="0" indent="0" algn="l">
               <a:buNone/>
             </a:pPr>
             <a:r>
@@ -16272,7 +16003,7 @@
             <a:prstDash val="solid"/>
           </a:ln>
           <a:effectLst>
-            <a:outerShdw sx="100000" sy="100000" kx="0" ky="0" algn="bl" rotWithShape="0" blurRad="76200" dist="25400" dir="8100000">
+            <a:outerShdw blurRad="76200" dist="25400" dir="8100000" algn="bl" rotWithShape="0">
               <a:srgbClr val="000000">
                 <a:alpha val="10000"/>
               </a:srgbClr>
@@ -16301,7 +16032,7 @@
           <a:bodyPr wrap="square" rtlCol="0" anchor="ctr"/>
           <a:lstStyle/>
           <a:p>
-            <a:pPr algn="ctr" indent="0" marL="0">
+            <a:pPr marL="0" indent="0" algn="ctr">
               <a:buNone/>
             </a:pPr>
             <a:r>
@@ -16365,7 +16096,7 @@
           <a:bodyPr wrap="square" rtlCol="0" anchor="ctr"/>
           <a:lstStyle/>
           <a:p>
-            <a:pPr algn="ctr" indent="0" marL="0">
+            <a:pPr marL="0" indent="0" algn="ctr">
               <a:buNone/>
             </a:pPr>
             <a:r>
@@ -16404,7 +16135,7 @@
           <a:bodyPr wrap="square" rtlCol="0" anchor="ctr"/>
           <a:lstStyle/>
           <a:p>
-            <a:pPr indent="0" marL="0">
+            <a:pPr marL="0" indent="0">
               <a:buNone/>
             </a:pPr>
             <a:r>
@@ -16446,7 +16177,7 @@
             <a:prstDash val="solid"/>
           </a:ln>
           <a:effectLst>
-            <a:outerShdw sx="100000" sy="100000" kx="0" ky="0" algn="bl" rotWithShape="0" blurRad="76200" dist="25400" dir="8100000">
+            <a:outerShdw blurRad="76200" dist="25400" dir="8100000" algn="bl" rotWithShape="0">
               <a:srgbClr val="000000">
                 <a:alpha val="10000"/>
               </a:srgbClr>
@@ -16475,7 +16206,7 @@
           <a:bodyPr wrap="square" rtlCol="0" anchor="ctr"/>
           <a:lstStyle/>
           <a:p>
-            <a:pPr algn="ctr" indent="0" marL="0">
+            <a:pPr marL="0" indent="0" algn="ctr">
               <a:buNone/>
             </a:pPr>
             <a:r>
@@ -16539,7 +16270,7 @@
           <a:bodyPr wrap="square" rtlCol="0" anchor="ctr"/>
           <a:lstStyle/>
           <a:p>
-            <a:pPr algn="ctr" indent="0" marL="0">
+            <a:pPr marL="0" indent="0" algn="ctr">
               <a:buNone/>
             </a:pPr>
             <a:r>
@@ -16578,7 +16309,7 @@
           <a:bodyPr wrap="square" rtlCol="0" anchor="ctr"/>
           <a:lstStyle/>
           <a:p>
-            <a:pPr indent="0" marL="0">
+            <a:pPr marL="0" indent="0">
               <a:buNone/>
             </a:pPr>
             <a:r>
@@ -16620,7 +16351,7 @@
             <a:prstDash val="solid"/>
           </a:ln>
           <a:effectLst>
-            <a:outerShdw sx="100000" sy="100000" kx="0" ky="0" algn="bl" rotWithShape="0" blurRad="76200" dist="25400" dir="8100000">
+            <a:outerShdw blurRad="76200" dist="25400" dir="8100000" algn="bl" rotWithShape="0">
               <a:srgbClr val="000000">
                 <a:alpha val="10000"/>
               </a:srgbClr>
@@ -16649,7 +16380,7 @@
           <a:bodyPr wrap="square" rtlCol="0" anchor="ctr"/>
           <a:lstStyle/>
           <a:p>
-            <a:pPr algn="ctr" indent="0" marL="0">
+            <a:pPr marL="0" indent="0" algn="ctr">
               <a:buNone/>
             </a:pPr>
             <a:r>
@@ -16713,7 +16444,7 @@
           <a:bodyPr wrap="square" rtlCol="0" anchor="ctr"/>
           <a:lstStyle/>
           <a:p>
-            <a:pPr algn="ctr" indent="0" marL="0">
+            <a:pPr marL="0" indent="0" algn="ctr">
               <a:buNone/>
             </a:pPr>
             <a:r>
@@ -16752,7 +16483,7 @@
           <a:bodyPr wrap="square" rtlCol="0" anchor="ctr"/>
           <a:lstStyle/>
           <a:p>
-            <a:pPr indent="0" marL="0">
+            <a:pPr marL="0" indent="0">
               <a:buNone/>
             </a:pPr>
             <a:r>
@@ -16816,7 +16547,7 @@
           <a:bodyPr wrap="square" rtlCol="0" anchor="ctr"/>
           <a:lstStyle/>
           <a:p>
-            <a:pPr algn="ctr" indent="0" marL="0">
+            <a:pPr marL="0" indent="0" algn="ctr">
               <a:buNone/>
             </a:pPr>
             <a:r>
@@ -16855,7 +16586,7 @@
           <a:bodyPr wrap="square" rtlCol="0" anchor="ctr"/>
           <a:lstStyle/>
           <a:p>
-            <a:pPr algn="l" indent="0" marL="0">
+            <a:pPr marL="0" indent="0" algn="l">
               <a:buNone/>
             </a:pPr>
             <a:r>
@@ -16894,7 +16625,7 @@
           <a:bodyPr wrap="square" rtlCol="0" anchor="ctr"/>
           <a:lstStyle/>
           <a:p>
-            <a:pPr algn="r" indent="0" marL="0">
+            <a:pPr marL="0" indent="0" algn="r">
               <a:buNone/>
             </a:pPr>
             <a:r>
@@ -16928,6 +16659,7 @@
         <a:solidFill>
           <a:srgbClr val="FFFFFF"/>
         </a:solidFill>
+        <a:effectLst/>
       </p:bgPr>
     </p:bg>
     <p:spTree>
@@ -16965,7 +16697,7 @@
           <a:bodyPr wrap="square" rtlCol="0" anchor="ctr"/>
           <a:lstStyle/>
           <a:p>
-            <a:pPr algn="l" indent="0" marL="0">
+            <a:pPr marL="0" indent="0" algn="l">
               <a:buNone/>
             </a:pPr>
             <a:r>
@@ -17054,7 +16786,7 @@
           <a:bodyPr wrap="square" rtlCol="0" anchor="ctr"/>
           <a:lstStyle/>
           <a:p>
-            <a:pPr algn="ctr" indent="0" marL="0">
+            <a:pPr marL="0" indent="0" algn="ctr">
               <a:buNone/>
             </a:pPr>
             <a:r>
@@ -17096,7 +16828,7 @@
             <a:prstDash val="solid"/>
           </a:ln>
           <a:effectLst>
-            <a:outerShdw sx="100000" sy="100000" kx="0" ky="0" algn="bl" rotWithShape="0" blurRad="50800" dist="12700" dir="8100000">
+            <a:outerShdw blurRad="50800" dist="12700" dir="8100000" algn="bl" rotWithShape="0">
               <a:srgbClr val="000000">
                 <a:alpha val="7000"/>
               </a:srgbClr>
@@ -17150,7 +16882,7 @@
           <a:bodyPr wrap="square" rtlCol="0" anchor="ctr"/>
           <a:lstStyle/>
           <a:p>
-            <a:pPr indent="0" marL="0">
+            <a:pPr marL="0" indent="0">
               <a:buNone/>
             </a:pPr>
             <a:r>
@@ -17189,7 +16921,7 @@
           <a:bodyPr wrap="square" rtlCol="0" anchor="ctr"/>
           <a:lstStyle/>
           <a:p>
-            <a:pPr indent="0" marL="0">
+            <a:pPr marL="0" indent="0">
               <a:buNone/>
             </a:pPr>
             <a:r>
@@ -17231,7 +16963,7 @@
             <a:prstDash val="solid"/>
           </a:ln>
           <a:effectLst>
-            <a:outerShdw sx="100000" sy="100000" kx="0" ky="0" algn="bl" rotWithShape="0" blurRad="50800" dist="12700" dir="8100000">
+            <a:outerShdw blurRad="50800" dist="12700" dir="8100000" algn="bl" rotWithShape="0">
               <a:srgbClr val="000000">
                 <a:alpha val="7000"/>
               </a:srgbClr>
@@ -17285,7 +17017,7 @@
           <a:bodyPr wrap="square" rtlCol="0" anchor="ctr"/>
           <a:lstStyle/>
           <a:p>
-            <a:pPr indent="0" marL="0">
+            <a:pPr marL="0" indent="0">
               <a:buNone/>
             </a:pPr>
             <a:r>
@@ -17324,7 +17056,7 @@
           <a:bodyPr wrap="square" rtlCol="0" anchor="ctr"/>
           <a:lstStyle/>
           <a:p>
-            <a:pPr indent="0" marL="0">
+            <a:pPr marL="0" indent="0">
               <a:buNone/>
             </a:pPr>
             <a:r>
@@ -17366,7 +17098,7 @@
             <a:prstDash val="solid"/>
           </a:ln>
           <a:effectLst>
-            <a:outerShdw sx="100000" sy="100000" kx="0" ky="0" algn="bl" rotWithShape="0" blurRad="50800" dist="12700" dir="8100000">
+            <a:outerShdw blurRad="50800" dist="12700" dir="8100000" algn="bl" rotWithShape="0">
               <a:srgbClr val="000000">
                 <a:alpha val="7000"/>
               </a:srgbClr>
@@ -17420,7 +17152,7 @@
           <a:bodyPr wrap="square" rtlCol="0" anchor="ctr"/>
           <a:lstStyle/>
           <a:p>
-            <a:pPr indent="0" marL="0">
+            <a:pPr marL="0" indent="0">
               <a:buNone/>
             </a:pPr>
             <a:r>
@@ -17459,7 +17191,7 @@
           <a:bodyPr wrap="square" rtlCol="0" anchor="ctr"/>
           <a:lstStyle/>
           <a:p>
-            <a:pPr indent="0" marL="0">
+            <a:pPr marL="0" indent="0">
               <a:buNone/>
             </a:pPr>
             <a:r>
@@ -17501,7 +17233,7 @@
             <a:prstDash val="solid"/>
           </a:ln>
           <a:effectLst>
-            <a:outerShdw sx="100000" sy="100000" kx="0" ky="0" algn="bl" rotWithShape="0" blurRad="50800" dist="12700" dir="8100000">
+            <a:outerShdw blurRad="50800" dist="12700" dir="8100000" algn="bl" rotWithShape="0">
               <a:srgbClr val="000000">
                 <a:alpha val="7000"/>
               </a:srgbClr>
@@ -17555,7 +17287,7 @@
           <a:bodyPr wrap="square" rtlCol="0" anchor="ctr"/>
           <a:lstStyle/>
           <a:p>
-            <a:pPr indent="0" marL="0">
+            <a:pPr marL="0" indent="0">
               <a:buNone/>
             </a:pPr>
             <a:r>
@@ -17594,7 +17326,7 @@
           <a:bodyPr wrap="square" rtlCol="0" anchor="ctr"/>
           <a:lstStyle/>
           <a:p>
-            <a:pPr indent="0" marL="0">
+            <a:pPr marL="0" indent="0">
               <a:buNone/>
             </a:pPr>
             <a:r>
@@ -17658,7 +17390,7 @@
           <a:bodyPr wrap="square" rtlCol="0" anchor="ctr"/>
           <a:lstStyle/>
           <a:p>
-            <a:pPr algn="ctr" indent="0" marL="0">
+            <a:pPr marL="0" indent="0" algn="ctr">
               <a:buNone/>
             </a:pPr>
             <a:r>
@@ -17697,7 +17429,7 @@
           <a:bodyPr wrap="square" rtlCol="0" anchor="ctr"/>
           <a:lstStyle/>
           <a:p>
-            <a:pPr algn="l" indent="0" marL="0">
+            <a:pPr marL="0" indent="0" algn="l">
               <a:buNone/>
             </a:pPr>
             <a:r>
@@ -17736,7 +17468,7 @@
           <a:bodyPr wrap="square" rtlCol="0" anchor="ctr"/>
           <a:lstStyle/>
           <a:p>
-            <a:pPr algn="r" indent="0" marL="0">
+            <a:pPr marL="0" indent="0" algn="r">
               <a:buNone/>
             </a:pPr>
             <a:r>
@@ -17770,6 +17502,7 @@
         <a:solidFill>
           <a:srgbClr val="FFFFFF"/>
         </a:solidFill>
+        <a:effectLst/>
       </p:bgPr>
     </p:bg>
     <p:spTree>
@@ -17807,7 +17540,7 @@
           <a:bodyPr wrap="square" rtlCol="0" anchor="ctr"/>
           <a:lstStyle/>
           <a:p>
-            <a:pPr algn="l" indent="0" marL="0">
+            <a:pPr marL="0" indent="0" algn="l">
               <a:buNone/>
             </a:pPr>
             <a:r>
@@ -17896,7 +17629,7 @@
           <a:bodyPr wrap="square" rtlCol="0" anchor="ctr"/>
           <a:lstStyle/>
           <a:p>
-            <a:pPr algn="ctr" indent="0" marL="0">
+            <a:pPr marL="0" indent="0" algn="ctr">
               <a:buNone/>
             </a:pPr>
             <a:r>
@@ -17935,7 +17668,7 @@
           <a:bodyPr wrap="square" rtlCol="0" anchor="ctr"/>
           <a:lstStyle/>
           <a:p>
-            <a:pPr indent="0" marL="0">
+            <a:pPr marL="0" indent="0">
               <a:buNone/>
             </a:pPr>
             <a:r>
@@ -17974,7 +17707,7 @@
           <a:bodyPr wrap="square" rtlCol="0" anchor="ctr"/>
           <a:lstStyle/>
           <a:p>
-            <a:pPr indent="0" marL="0">
+            <a:pPr marL="0" indent="0">
               <a:buNone/>
             </a:pPr>
             <a:r>
@@ -18013,7 +17746,7 @@
           <a:bodyPr wrap="square" rtlCol="0" anchor="ctr"/>
           <a:lstStyle/>
           <a:p>
-            <a:pPr indent="0" marL="0">
+            <a:pPr marL="0" indent="0">
               <a:buNone/>
             </a:pPr>
             <a:r>
@@ -18052,7 +17785,7 @@
           <a:bodyPr wrap="square" rtlCol="0" anchor="ctr"/>
           <a:lstStyle/>
           <a:p>
-            <a:pPr indent="0" marL="0">
+            <a:pPr marL="0" indent="0">
               <a:buNone/>
             </a:pPr>
             <a:r>
@@ -18091,7 +17824,7 @@
           <a:bodyPr wrap="square" rtlCol="0" anchor="ctr"/>
           <a:lstStyle/>
           <a:p>
-            <a:pPr indent="0" marL="0">
+            <a:pPr marL="0" indent="0">
               <a:buNone/>
             </a:pPr>
             <a:r>
@@ -18130,7 +17863,7 @@
           <a:bodyPr wrap="square" rtlCol="0" anchor="ctr"/>
           <a:lstStyle/>
           <a:p>
-            <a:pPr indent="0" marL="0">
+            <a:pPr marL="0" indent="0">
               <a:buNone/>
             </a:pPr>
             <a:r>
@@ -18194,7 +17927,7 @@
           <a:bodyPr wrap="square" rtlCol="0" anchor="ctr"/>
           <a:lstStyle/>
           <a:p>
-            <a:pPr algn="ctr" indent="0" marL="0">
+            <a:pPr marL="0" indent="0" algn="ctr">
               <a:buNone/>
             </a:pPr>
             <a:r>
@@ -18233,7 +17966,7 @@
           <a:bodyPr wrap="square" rtlCol="0" anchor="ctr"/>
           <a:lstStyle/>
           <a:p>
-            <a:pPr algn="ctr" indent="0" marL="0">
+            <a:pPr marL="0" indent="0" algn="ctr">
               <a:buNone/>
             </a:pPr>
             <a:r>
@@ -18297,7 +18030,7 @@
           <a:bodyPr wrap="square" rtlCol="0" anchor="ctr"/>
           <a:lstStyle/>
           <a:p>
-            <a:pPr algn="ctr" indent="0" marL="0">
+            <a:pPr marL="0" indent="0" algn="ctr">
               <a:buNone/>
             </a:pPr>
             <a:r>
@@ -18336,7 +18069,7 @@
           <a:bodyPr wrap="square" rtlCol="0" anchor="ctr"/>
           <a:lstStyle/>
           <a:p>
-            <a:pPr algn="ctr" indent="0" marL="0">
+            <a:pPr marL="0" indent="0" algn="ctr">
               <a:buNone/>
             </a:pPr>
             <a:r>
@@ -18400,7 +18133,7 @@
           <a:bodyPr wrap="square" rtlCol="0" anchor="ctr"/>
           <a:lstStyle/>
           <a:p>
-            <a:pPr algn="ctr" indent="0" marL="0">
+            <a:pPr marL="0" indent="0" algn="ctr">
               <a:buNone/>
             </a:pPr>
             <a:r>
@@ -18439,7 +18172,7 @@
           <a:bodyPr wrap="square" rtlCol="0" anchor="ctr"/>
           <a:lstStyle/>
           <a:p>
-            <a:pPr algn="ctr" indent="0" marL="0">
+            <a:pPr marL="0" indent="0" algn="ctr">
               <a:buNone/>
             </a:pPr>
             <a:r>
@@ -18503,7 +18236,7 @@
           <a:bodyPr wrap="square" rtlCol="0" anchor="ctr"/>
           <a:lstStyle/>
           <a:p>
-            <a:pPr algn="ctr" indent="0" marL="0">
+            <a:pPr marL="0" indent="0" algn="ctr">
               <a:buNone/>
             </a:pPr>
             <a:r>
@@ -18542,7 +18275,7 @@
           <a:bodyPr wrap="square" rtlCol="0" anchor="ctr"/>
           <a:lstStyle/>
           <a:p>
-            <a:pPr algn="ctr" indent="0" marL="0">
+            <a:pPr marL="0" indent="0" algn="ctr">
               <a:buNone/>
             </a:pPr>
             <a:r>
@@ -18606,7 +18339,7 @@
           <a:bodyPr wrap="square" rtlCol="0" anchor="ctr"/>
           <a:lstStyle/>
           <a:p>
-            <a:pPr indent="0" marL="0">
+            <a:pPr marL="0" indent="0">
               <a:buNone/>
             </a:pPr>
             <a:r>
@@ -18670,7 +18403,7 @@
           <a:bodyPr wrap="square" rtlCol="0" anchor="ctr"/>
           <a:lstStyle/>
           <a:p>
-            <a:pPr indent="0" marL="0">
+            <a:pPr marL="0" indent="0">
               <a:buNone/>
             </a:pPr>
             <a:r>
@@ -18709,7 +18442,7 @@
           <a:bodyPr wrap="square" rtlCol="0" anchor="ctr"/>
           <a:lstStyle/>
           <a:p>
-            <a:pPr algn="l" indent="0" marL="0">
+            <a:pPr marL="0" indent="0" algn="l">
               <a:buNone/>
             </a:pPr>
             <a:r>
@@ -18748,7 +18481,7 @@
           <a:bodyPr wrap="square" rtlCol="0" anchor="ctr"/>
           <a:lstStyle/>
           <a:p>
-            <a:pPr algn="r" indent="0" marL="0">
+            <a:pPr marL="0" indent="0" algn="r">
               <a:buNone/>
             </a:pPr>
             <a:r>
@@ -18782,6 +18515,7 @@
         <a:solidFill>
           <a:srgbClr val="FFFFFF"/>
         </a:solidFill>
+        <a:effectLst/>
       </p:bgPr>
     </p:bg>
     <p:spTree>
@@ -18819,7 +18553,7 @@
           <a:bodyPr wrap="square" rtlCol="0" anchor="ctr"/>
           <a:lstStyle/>
           <a:p>
-            <a:pPr algn="l" indent="0" marL="0">
+            <a:pPr marL="0" indent="0" algn="l">
               <a:buNone/>
             </a:pPr>
             <a:r>
@@ -18908,7 +18642,7 @@
           <a:bodyPr wrap="square" rtlCol="0" anchor="ctr"/>
           <a:lstStyle/>
           <a:p>
-            <a:pPr algn="ctr" indent="0" marL="0">
+            <a:pPr marL="0" indent="0" algn="ctr">
               <a:buNone/>
             </a:pPr>
             <a:r>
@@ -18972,7 +18706,7 @@
           <a:bodyPr wrap="square" rtlCol="0" anchor="ctr"/>
           <a:lstStyle/>
           <a:p>
-            <a:pPr indent="0" marL="0">
+            <a:pPr marL="0" indent="0">
               <a:buNone/>
             </a:pPr>
             <a:r>
@@ -19011,7 +18745,7 @@
           <a:bodyPr wrap="square" rtlCol="0" anchor="ctr"/>
           <a:lstStyle/>
           <a:p>
-            <a:pPr indent="0" marL="0">
+            <a:pPr marL="0" indent="0">
               <a:buNone/>
             </a:pPr>
             <a:r>
@@ -19050,7 +18784,7 @@
           <a:bodyPr wrap="square" rtlCol="0" anchor="ctr"/>
           <a:lstStyle/>
           <a:p>
-            <a:pPr indent="0" marL="0">
+            <a:pPr marL="0" indent="0">
               <a:buNone/>
             </a:pPr>
             <a:r>
@@ -19089,7 +18823,7 @@
           <a:bodyPr wrap="square" rtlCol="0" anchor="ctr"/>
           <a:lstStyle/>
           <a:p>
-            <a:pPr indent="0" marL="0">
+            <a:pPr marL="0" indent="0">
               <a:buNone/>
             </a:pPr>
             <a:r>
@@ -19128,7 +18862,7 @@
           <a:bodyPr wrap="square" rtlCol="0" anchor="ctr"/>
           <a:lstStyle/>
           <a:p>
-            <a:pPr indent="0" marL="0">
+            <a:pPr marL="0" indent="0">
               <a:buNone/>
             </a:pPr>
             <a:r>
@@ -19192,7 +18926,7 @@
           <a:bodyPr wrap="square" rtlCol="0" anchor="ctr"/>
           <a:lstStyle/>
           <a:p>
-            <a:pPr algn="ctr" indent="0" marL="0">
+            <a:pPr marL="0" indent="0" algn="ctr">
               <a:buNone/>
             </a:pPr>
             <a:r>
@@ -19256,7 +18990,7 @@
           <a:bodyPr wrap="square" rtlCol="0" anchor="ctr"/>
           <a:lstStyle/>
           <a:p>
-            <a:pPr indent="0" marL="0">
+            <a:pPr marL="0" indent="0">
               <a:buNone/>
             </a:pPr>
             <a:r>
@@ -19295,7 +19029,7 @@
           <a:bodyPr wrap="square" rtlCol="0" anchor="ctr"/>
           <a:lstStyle/>
           <a:p>
-            <a:pPr indent="0" marL="0">
+            <a:pPr marL="0" indent="0">
               <a:buNone/>
             </a:pPr>
             <a:r>
@@ -19334,7 +19068,7 @@
           <a:bodyPr wrap="square" rtlCol="0" anchor="ctr"/>
           <a:lstStyle/>
           <a:p>
-            <a:pPr indent="0" marL="0">
+            <a:pPr marL="0" indent="0">
               <a:buNone/>
             </a:pPr>
             <a:r>
@@ -19373,7 +19107,7 @@
           <a:bodyPr wrap="square" rtlCol="0" anchor="ctr"/>
           <a:lstStyle/>
           <a:p>
-            <a:pPr indent="0" marL="0">
+            <a:pPr marL="0" indent="0">
               <a:buNone/>
             </a:pPr>
             <a:r>
@@ -19412,7 +19146,7 @@
           <a:bodyPr wrap="square" rtlCol="0" anchor="ctr"/>
           <a:lstStyle/>
           <a:p>
-            <a:pPr indent="0" marL="0">
+            <a:pPr marL="0" indent="0">
               <a:buNone/>
             </a:pPr>
             <a:r>
@@ -19476,7 +19210,7 @@
           <a:bodyPr wrap="square" rtlCol="0" anchor="ctr"/>
           <a:lstStyle/>
           <a:p>
-            <a:pPr algn="ctr" indent="0" marL="0">
+            <a:pPr marL="0" indent="0" algn="ctr">
               <a:buNone/>
             </a:pPr>
             <a:r>
@@ -19540,7 +19274,7 @@
           <a:bodyPr wrap="square" rtlCol="0" anchor="ctr"/>
           <a:lstStyle/>
           <a:p>
-            <a:pPr indent="0" marL="0">
+            <a:pPr marL="0" indent="0">
               <a:buNone/>
             </a:pPr>
             <a:r>
@@ -19579,7 +19313,7 @@
           <a:bodyPr wrap="square" rtlCol="0" anchor="ctr"/>
           <a:lstStyle/>
           <a:p>
-            <a:pPr indent="0" marL="0">
+            <a:pPr marL="0" indent="0">
               <a:buNone/>
             </a:pPr>
             <a:r>
@@ -19618,7 +19352,7 @@
           <a:bodyPr wrap="square" rtlCol="0" anchor="ctr"/>
           <a:lstStyle/>
           <a:p>
-            <a:pPr indent="0" marL="0">
+            <a:pPr marL="0" indent="0">
               <a:buNone/>
             </a:pPr>
             <a:r>
@@ -19657,7 +19391,7 @@
           <a:bodyPr wrap="square" rtlCol="0" anchor="ctr"/>
           <a:lstStyle/>
           <a:p>
-            <a:pPr indent="0" marL="0">
+            <a:pPr marL="0" indent="0">
               <a:buNone/>
             </a:pPr>
             <a:r>
@@ -19721,7 +19455,7 @@
           <a:bodyPr wrap="square" rtlCol="0" anchor="ctr"/>
           <a:lstStyle/>
           <a:p>
-            <a:pPr algn="ctr" indent="0" marL="0">
+            <a:pPr marL="0" indent="0" algn="ctr">
               <a:buNone/>
             </a:pPr>
             <a:r>
@@ -19760,7 +19494,7 @@
           <a:bodyPr wrap="square" rtlCol="0" anchor="ctr"/>
           <a:lstStyle/>
           <a:p>
-            <a:pPr algn="l" indent="0" marL="0">
+            <a:pPr marL="0" indent="0" algn="l">
               <a:buNone/>
             </a:pPr>
             <a:r>
@@ -19799,7 +19533,7 @@
           <a:bodyPr wrap="square" rtlCol="0" anchor="ctr"/>
           <a:lstStyle/>
           <a:p>
-            <a:pPr algn="r" indent="0" marL="0">
+            <a:pPr marL="0" indent="0" algn="r">
               <a:buNone/>
             </a:pPr>
             <a:r>
@@ -19833,6 +19567,7 @@
         <a:solidFill>
           <a:srgbClr val="FFFFFF"/>
         </a:solidFill>
+        <a:effectLst/>
       </p:bgPr>
     </p:bg>
     <p:spTree>
@@ -19870,7 +19605,7 @@
           <a:bodyPr wrap="square" rtlCol="0" anchor="ctr"/>
           <a:lstStyle/>
           <a:p>
-            <a:pPr algn="l" indent="0" marL="0">
+            <a:pPr marL="0" indent="0" algn="l">
               <a:buNone/>
             </a:pPr>
             <a:r>
@@ -19984,7 +19719,7 @@
           <a:bodyPr wrap="square" rtlCol="0" anchor="ctr"/>
           <a:lstStyle/>
           <a:p>
-            <a:pPr algn="ctr" indent="0" marL="0">
+            <a:pPr marL="0" indent="0" algn="ctr">
               <a:buNone/>
             </a:pPr>
             <a:r>
@@ -20023,7 +19758,7 @@
           <a:bodyPr wrap="square" rtlCol="0" anchor="ctr"/>
           <a:lstStyle/>
           <a:p>
-            <a:pPr indent="0" marL="0">
+            <a:pPr marL="0" indent="0">
               <a:buNone/>
             </a:pPr>
             <a:r>
@@ -20087,7 +19822,7 @@
           <a:bodyPr wrap="square" rtlCol="0" anchor="ctr"/>
           <a:lstStyle/>
           <a:p>
-            <a:pPr indent="0" marL="0">
+            <a:pPr marL="0" indent="0">
               <a:buNone/>
             </a:pPr>
             <a:r>
@@ -20176,7 +19911,7 @@
           <a:bodyPr wrap="square" rtlCol="0" anchor="ctr"/>
           <a:lstStyle/>
           <a:p>
-            <a:pPr algn="ctr" indent="0" marL="0">
+            <a:pPr marL="0" indent="0" algn="ctr">
               <a:buNone/>
             </a:pPr>
             <a:r>
@@ -20215,7 +19950,7 @@
           <a:bodyPr wrap="square" rtlCol="0" anchor="ctr"/>
           <a:lstStyle/>
           <a:p>
-            <a:pPr indent="0" marL="0">
+            <a:pPr marL="0" indent="0">
               <a:buNone/>
             </a:pPr>
             <a:r>
@@ -20279,7 +20014,7 @@
           <a:bodyPr wrap="square" rtlCol="0" anchor="ctr"/>
           <a:lstStyle/>
           <a:p>
-            <a:pPr indent="0" marL="0">
+            <a:pPr marL="0" indent="0">
               <a:buNone/>
             </a:pPr>
             <a:r>
@@ -20368,7 +20103,7 @@
           <a:bodyPr wrap="square" rtlCol="0" anchor="ctr"/>
           <a:lstStyle/>
           <a:p>
-            <a:pPr algn="ctr" indent="0" marL="0">
+            <a:pPr marL="0" indent="0" algn="ctr">
               <a:buNone/>
             </a:pPr>
             <a:r>
@@ -20407,7 +20142,7 @@
           <a:bodyPr wrap="square" rtlCol="0" anchor="ctr"/>
           <a:lstStyle/>
           <a:p>
-            <a:pPr indent="0" marL="0">
+            <a:pPr marL="0" indent="0">
               <a:buNone/>
             </a:pPr>
             <a:r>
@@ -20471,7 +20206,7 @@
           <a:bodyPr wrap="square" rtlCol="0" anchor="ctr"/>
           <a:lstStyle/>
           <a:p>
-            <a:pPr indent="0" marL="0">
+            <a:pPr marL="0" indent="0">
               <a:buNone/>
             </a:pPr>
             <a:r>
@@ -20560,7 +20295,7 @@
           <a:bodyPr wrap="square" rtlCol="0" anchor="ctr"/>
           <a:lstStyle/>
           <a:p>
-            <a:pPr algn="ctr" indent="0" marL="0">
+            <a:pPr marL="0" indent="0" algn="ctr">
               <a:buNone/>
             </a:pPr>
             <a:r>
@@ -20599,7 +20334,7 @@
           <a:bodyPr wrap="square" rtlCol="0" anchor="ctr"/>
           <a:lstStyle/>
           <a:p>
-            <a:pPr indent="0" marL="0">
+            <a:pPr marL="0" indent="0">
               <a:buNone/>
             </a:pPr>
             <a:r>
@@ -20663,7 +20398,7 @@
           <a:bodyPr wrap="square" rtlCol="0" anchor="ctr"/>
           <a:lstStyle/>
           <a:p>
-            <a:pPr indent="0" marL="0">
+            <a:pPr marL="0" indent="0">
               <a:buNone/>
             </a:pPr>
             <a:r>
@@ -20752,7 +20487,7 @@
           <a:bodyPr wrap="square" rtlCol="0" anchor="ctr"/>
           <a:lstStyle/>
           <a:p>
-            <a:pPr algn="ctr" indent="0" marL="0">
+            <a:pPr marL="0" indent="0" algn="ctr">
               <a:buNone/>
             </a:pPr>
             <a:r>
@@ -20791,7 +20526,7 @@
           <a:bodyPr wrap="square" rtlCol="0" anchor="ctr"/>
           <a:lstStyle/>
           <a:p>
-            <a:pPr indent="0" marL="0">
+            <a:pPr marL="0" indent="0">
               <a:buNone/>
             </a:pPr>
             <a:r>
@@ -20855,7 +20590,7 @@
           <a:bodyPr wrap="square" rtlCol="0" anchor="ctr"/>
           <a:lstStyle/>
           <a:p>
-            <a:pPr indent="0" marL="0">
+            <a:pPr marL="0" indent="0">
               <a:buNone/>
             </a:pPr>
             <a:r>
@@ -20919,7 +20654,7 @@
           <a:bodyPr wrap="square" rtlCol="0" anchor="ctr"/>
           <a:lstStyle/>
           <a:p>
-            <a:pPr algn="ctr" indent="0" marL="0">
+            <a:pPr marL="0" indent="0" algn="ctr">
               <a:buNone/>
             </a:pPr>
             <a:r>
@@ -20958,20 +20693,9 @@
           <a:bodyPr wrap="square" rtlCol="0" anchor="ctr"/>
           <a:lstStyle/>
           <a:p>
-            <a:pPr algn="l" indent="0" marL="0">
-              <a:buNone/>
-            </a:pPr>
-            <a:r>
-              <a:rPr lang="en-US" sz="900" dirty="0">
-                <a:solidFill>
-                  <a:srgbClr val="6B7280"/>
-                </a:solidFill>
-                <a:latin typeface="Calibri" pitchFamily="34" charset="0"/>
-                <a:ea typeface="Calibri" pitchFamily="34" charset="-122"/>
-                <a:cs typeface="Calibri" pitchFamily="34" charset="-120"/>
-              </a:rPr>
-              <a:t>Nifty 100 Financial Intelligence System</a:t>
-            </a:r>
+            <a:pPr marL="0" indent="0" algn="l">
+              <a:buNone/>
+            </a:pPr>
             <a:endParaRPr lang="en-US" sz="900" dirty="0"/>
           </a:p>
         </p:txBody>
@@ -20997,7 +20721,7 @@
           <a:bodyPr wrap="square" rtlCol="0" anchor="ctr"/>
           <a:lstStyle/>
           <a:p>
-            <a:pPr algn="r" indent="0" marL="0">
+            <a:pPr marL="0" indent="0" algn="r">
               <a:buNone/>
             </a:pPr>
             <a:r>
@@ -21316,4 +21040,299 @@
     </a:ext>
   </a:extLst>
 </a:theme>
+</file>
+
+<file path=ppt/theme/theme2.xml><?xml version="1.0" encoding="utf-8"?>
+<a:theme xmlns:a="http://schemas.openxmlformats.org/drawingml/2006/main" name="Office Theme">
+  <a:themeElements>
+    <a:clrScheme name="Office">
+      <a:dk1>
+        <a:sysClr val="windowText" lastClr="000000"/>
+      </a:dk1>
+      <a:lt1>
+        <a:sysClr val="window" lastClr="FFFFFF"/>
+      </a:lt1>
+      <a:dk2>
+        <a:srgbClr val="44546A"/>
+      </a:dk2>
+      <a:lt2>
+        <a:srgbClr val="E7E6E6"/>
+      </a:lt2>
+      <a:accent1>
+        <a:srgbClr val="4472C4"/>
+      </a:accent1>
+      <a:accent2>
+        <a:srgbClr val="ED7D31"/>
+      </a:accent2>
+      <a:accent3>
+        <a:srgbClr val="A5A5A5"/>
+      </a:accent3>
+      <a:accent4>
+        <a:srgbClr val="FFC000"/>
+      </a:accent4>
+      <a:accent5>
+        <a:srgbClr val="5B9BD5"/>
+      </a:accent5>
+      <a:accent6>
+        <a:srgbClr val="70AD47"/>
+      </a:accent6>
+      <a:hlink>
+        <a:srgbClr val="0563C1"/>
+      </a:hlink>
+      <a:folHlink>
+        <a:srgbClr val="954F72"/>
+      </a:folHlink>
+    </a:clrScheme>
+    <a:fontScheme name="Office">
+      <a:majorFont>
+        <a:latin typeface="Calibri Light" panose="020F0302020204030204"/>
+        <a:ea typeface=""/>
+        <a:cs typeface=""/>
+        <a:font script="Jpan" typeface="游ゴシック Light"/>
+        <a:font script="Hang" typeface="맑은 고딕"/>
+        <a:font script="Hans" typeface="等线 Light"/>
+        <a:font script="Hant" typeface="新細明體"/>
+        <a:font script="Arab" typeface="Times New Roman"/>
+        <a:font script="Hebr" typeface="Times New Roman"/>
+        <a:font script="Thai" typeface="Angsana New"/>
+        <a:font script="Ethi" typeface="Nyala"/>
+        <a:font script="Beng" typeface="Vrinda"/>
+        <a:font script="Gujr" typeface="Shruti"/>
+        <a:font script="Khmr" typeface="MoolBoran"/>
+        <a:font script="Knda" typeface="Tunga"/>
+        <a:font script="Guru" typeface="Raavi"/>
+        <a:font script="Cans" typeface="Euphemia"/>
+        <a:font script="Cher" typeface="Plantagenet Cherokee"/>
+        <a:font script="Yiii" typeface="Microsoft Yi Baiti"/>
+        <a:font script="Tibt" typeface="Microsoft Himalaya"/>
+        <a:font script="Thaa" typeface="MV Boli"/>
+        <a:font script="Deva" typeface="Mangal"/>
+        <a:font script="Telu" typeface="Gautami"/>
+        <a:font script="Taml" typeface="Latha"/>
+        <a:font script="Syrc" typeface="Estrangelo Edessa"/>
+        <a:font script="Orya" typeface="Kalinga"/>
+        <a:font script="Mlym" typeface="Kartika"/>
+        <a:font script="Laoo" typeface="DokChampa"/>
+        <a:font script="Sinh" typeface="Iskoola Pota"/>
+        <a:font script="Mong" typeface="Mongolian Baiti"/>
+        <a:font script="Viet" typeface="Times New Roman"/>
+        <a:font script="Uigh" typeface="Microsoft Uighur"/>
+        <a:font script="Geor" typeface="Sylfaen"/>
+        <a:font script="Armn" typeface="Arial"/>
+        <a:font script="Bugi" typeface="Leelawadee UI"/>
+        <a:font script="Bopo" typeface="Microsoft JhengHei"/>
+        <a:font script="Java" typeface="Javanese Text"/>
+        <a:font script="Lisu" typeface="Segoe UI"/>
+        <a:font script="Mymr" typeface="Myanmar Text"/>
+        <a:font script="Nkoo" typeface="Ebrima"/>
+        <a:font script="Olck" typeface="Nirmala UI"/>
+        <a:font script="Osma" typeface="Ebrima"/>
+        <a:font script="Phag" typeface="Phagspa"/>
+        <a:font script="Syrn" typeface="Estrangelo Edessa"/>
+        <a:font script="Syrj" typeface="Estrangelo Edessa"/>
+        <a:font script="Syre" typeface="Estrangelo Edessa"/>
+        <a:font script="Sora" typeface="Nirmala UI"/>
+        <a:font script="Tale" typeface="Microsoft Tai Le"/>
+        <a:font script="Talu" typeface="Microsoft New Tai Lue"/>
+        <a:font script="Tfng" typeface="Ebrima"/>
+      </a:majorFont>
+      <a:minorFont>
+        <a:latin typeface="Calibri" panose="020F0502020204030204"/>
+        <a:ea typeface=""/>
+        <a:cs typeface=""/>
+        <a:font script="Jpan" typeface="游ゴシック"/>
+        <a:font script="Hang" typeface="맑은 고딕"/>
+        <a:font script="Hans" typeface="等线"/>
+        <a:font script="Hant" typeface="新細明體"/>
+        <a:font script="Arab" typeface="Arial"/>
+        <a:font script="Hebr" typeface="Arial"/>
+        <a:font script="Thai" typeface="Cordia New"/>
+        <a:font script="Ethi" typeface="Nyala"/>
+        <a:font script="Beng" typeface="Vrinda"/>
+        <a:font script="Gujr" typeface="Shruti"/>
+        <a:font script="Khmr" typeface="DaunPenh"/>
+        <a:font script="Knda" typeface="Tunga"/>
+        <a:font script="Guru" typeface="Raavi"/>
+        <a:font script="Cans" typeface="Euphemia"/>
+        <a:font script="Cher" typeface="Plantagenet Cherokee"/>
+        <a:font script="Yiii" typeface="Microsoft Yi Baiti"/>
+        <a:font script="Tibt" typeface="Microsoft Himalaya"/>
+        <a:font script="Thaa" typeface="MV Boli"/>
+        <a:font script="Deva" typeface="Mangal"/>
+        <a:font script="Telu" typeface="Gautami"/>
+        <a:font script="Taml" typeface="Latha"/>
+        <a:font script="Syrc" typeface="Estrangelo Edessa"/>
+        <a:font script="Orya" typeface="Kalinga"/>
+        <a:font script="Mlym" typeface="Kartika"/>
+        <a:font script="Laoo" typeface="DokChampa"/>
+        <a:font script="Sinh" typeface="Iskoola Pota"/>
+        <a:font script="Mong" typeface="Mongolian Baiti"/>
+        <a:font script="Viet" typeface="Arial"/>
+        <a:font script="Uigh" typeface="Microsoft Uighur"/>
+        <a:font script="Geor" typeface="Sylfaen"/>
+        <a:font script="Armn" typeface="Arial"/>
+        <a:font script="Bugi" typeface="Leelawadee UI"/>
+        <a:font script="Bopo" typeface="Microsoft JhengHei"/>
+        <a:font script="Java" typeface="Javanese Text"/>
+        <a:font script="Lisu" typeface="Segoe UI"/>
+        <a:font script="Mymr" typeface="Myanmar Text"/>
+        <a:font script="Nkoo" typeface="Ebrima"/>
+        <a:font script="Olck" typeface="Nirmala UI"/>
+        <a:font script="Osma" typeface="Ebrima"/>
+        <a:font script="Phag" typeface="Phagspa"/>
+        <a:font script="Syrn" typeface="Estrangelo Edessa"/>
+        <a:font script="Syrj" typeface="Estrangelo Edessa"/>
+        <a:font script="Syre" typeface="Estrangelo Edessa"/>
+        <a:font script="Sora" typeface="Nirmala UI"/>
+        <a:font script="Tale" typeface="Microsoft Tai Le"/>
+        <a:font script="Talu" typeface="Microsoft New Tai Lue"/>
+        <a:font script="Tfng" typeface="Ebrima"/>
+      </a:minorFont>
+    </a:fontScheme>
+    <a:fmtScheme name="Office">
+      <a:fillStyleLst>
+        <a:solidFill>
+          <a:schemeClr val="phClr"/>
+        </a:solidFill>
+        <a:gradFill rotWithShape="1">
+          <a:gsLst>
+            <a:gs pos="0">
+              <a:schemeClr val="phClr">
+                <a:lumMod val="110000"/>
+                <a:satMod val="105000"/>
+                <a:tint val="67000"/>
+              </a:schemeClr>
+            </a:gs>
+            <a:gs pos="50000">
+              <a:schemeClr val="phClr">
+                <a:lumMod val="105000"/>
+                <a:satMod val="103000"/>
+                <a:tint val="73000"/>
+              </a:schemeClr>
+            </a:gs>
+            <a:gs pos="100000">
+              <a:schemeClr val="phClr">
+                <a:lumMod val="105000"/>
+                <a:satMod val="109000"/>
+                <a:tint val="81000"/>
+              </a:schemeClr>
+            </a:gs>
+          </a:gsLst>
+          <a:lin ang="5400000" scaled="0"/>
+        </a:gradFill>
+        <a:gradFill rotWithShape="1">
+          <a:gsLst>
+            <a:gs pos="0">
+              <a:schemeClr val="phClr">
+                <a:satMod val="103000"/>
+                <a:lumMod val="102000"/>
+                <a:tint val="94000"/>
+              </a:schemeClr>
+            </a:gs>
+            <a:gs pos="50000">
+              <a:schemeClr val="phClr">
+                <a:satMod val="110000"/>
+                <a:lumMod val="100000"/>
+                <a:shade val="100000"/>
+              </a:schemeClr>
+            </a:gs>
+            <a:gs pos="100000">
+              <a:schemeClr val="phClr">
+                <a:lumMod val="99000"/>
+                <a:satMod val="120000"/>
+                <a:shade val="78000"/>
+              </a:schemeClr>
+            </a:gs>
+          </a:gsLst>
+          <a:lin ang="5400000" scaled="0"/>
+        </a:gradFill>
+      </a:fillStyleLst>
+      <a:lnStyleLst>
+        <a:ln w="6350" cap="flat" cmpd="sng" algn="ctr">
+          <a:solidFill>
+            <a:schemeClr val="phClr"/>
+          </a:solidFill>
+          <a:prstDash val="solid"/>
+          <a:miter lim="800000"/>
+        </a:ln>
+        <a:ln w="12700" cap="flat" cmpd="sng" algn="ctr">
+          <a:solidFill>
+            <a:schemeClr val="phClr"/>
+          </a:solidFill>
+          <a:prstDash val="solid"/>
+          <a:miter lim="800000"/>
+        </a:ln>
+        <a:ln w="19050" cap="flat" cmpd="sng" algn="ctr">
+          <a:solidFill>
+            <a:schemeClr val="phClr"/>
+          </a:solidFill>
+          <a:prstDash val="solid"/>
+          <a:miter lim="800000"/>
+        </a:ln>
+      </a:lnStyleLst>
+      <a:effectStyleLst>
+        <a:effectStyle>
+          <a:effectLst/>
+        </a:effectStyle>
+        <a:effectStyle>
+          <a:effectLst/>
+        </a:effectStyle>
+        <a:effectStyle>
+          <a:effectLst>
+            <a:outerShdw blurRad="57150" dist="19050" dir="5400000" algn="ctr" rotWithShape="0">
+              <a:srgbClr val="000000">
+                <a:alpha val="63000"/>
+              </a:srgbClr>
+            </a:outerShdw>
+          </a:effectLst>
+        </a:effectStyle>
+      </a:effectStyleLst>
+      <a:bgFillStyleLst>
+        <a:solidFill>
+          <a:schemeClr val="phClr"/>
+        </a:solidFill>
+        <a:solidFill>
+          <a:schemeClr val="phClr">
+            <a:tint val="95000"/>
+            <a:satMod val="170000"/>
+          </a:schemeClr>
+        </a:solidFill>
+        <a:gradFill rotWithShape="1">
+          <a:gsLst>
+            <a:gs pos="0">
+              <a:schemeClr val="phClr">
+                <a:tint val="93000"/>
+                <a:satMod val="150000"/>
+                <a:shade val="98000"/>
+                <a:lumMod val="102000"/>
+              </a:schemeClr>
+            </a:gs>
+            <a:gs pos="50000">
+              <a:schemeClr val="phClr">
+                <a:tint val="98000"/>
+                <a:satMod val="130000"/>
+                <a:shade val="90000"/>
+                <a:lumMod val="103000"/>
+              </a:schemeClr>
+            </a:gs>
+            <a:gs pos="100000">
+              <a:schemeClr val="phClr">
+                <a:shade val="63000"/>
+                <a:satMod val="120000"/>
+              </a:schemeClr>
+            </a:gs>
+          </a:gsLst>
+          <a:lin ang="5400000" scaled="0"/>
+        </a:gradFill>
+      </a:bgFillStyleLst>
+    </a:fmtScheme>
+  </a:themeElements>
+  <a:objectDefaults/>
+  <a:extraClrSchemeLst/>
+  <a:extLst>
+    <a:ext uri="{05A4C25C-085E-4340-85A3-A5531E510DB2}">
+      <thm15:themeFamily xmlns:thm15="http://schemas.microsoft.com/office/thememl/2012/main" name="Office Theme" id="{62F939B6-93AF-4DB8-9C6B-D6C7DFDC589F}" vid="{4A3C46E8-61CC-4603-A589-7422A47A8E4A}"/>
+    </a:ext>
+  </a:extLst>
+</a:theme>
 </file>